--- a/data/testres/test2.pptx
+++ b/data/testres/test2.pptx
@@ -51,8 +51,6 @@
     <p:sldId id="299" r:id="rId50"/>
     <p:sldId id="300" r:id="rId51"/>
     <p:sldId id="301" r:id="rId52"/>
-    <p:sldId id="302" r:id="rId53"/>
-    <p:sldId id="303" r:id="rId54"/>
   </p:sldIdLst>
   <p:sldSz cx="12188952" cy="6858000" type="screen4x3"/>
   <p:notesSz cx="6858000" cy="9144000"/>
@@ -3232,15 +3230,57 @@
           </a:bodyPr>
           <a:lstStyle/>
           <a:p>
-            <a:pPr algn="ctr"/>
-            <a:r>
-              <a:rPr sz="4400" b="1">
-                <a:solidFill>
-                  <a:srgbClr val="FAD02C"/>
-                </a:solidFill>
-                <a:latin typeface="Arial"/>
-              </a:rPr>
-              <a:t>Chemistry Midterm —MCQ Practice</a:t>
+            <a:pPr algn="ctr">
+              <a:defRPr sz="4400" b="1">
+                <a:solidFill>
+                  <a:srgbClr val="FAD02C"/>
+                </a:solidFill>
+                <a:latin typeface="Arial"/>
+              </a:defRPr>
+            </a:pPr>
+            <a:r>
+              <a:rPr lang="en-US" sz="4400" b="1">
+                <a:solidFill>
+                  <a:srgbClr val="FAD02C"/>
+                </a:solidFill>
+                <a:latin typeface="Arial"/>
+              </a:rPr>
+              <a:t>Chemistry Midterm —</a:t>
+            </a:r>
+            <mc:AlternateContent xmlns:mc="http://schemas.openxmlformats.org/markup-compatibility/2006" xmlns:a14="http://schemas.microsoft.com/office/drawing/2010/main">
+              <mc:Choice Requires="a14">
+                <a14:m>
+                  <m:oMath xmlns:m="http://schemas.openxmlformats.org/officeDocument/2006/math">
+                    <m:r>
+                      <m:t>M</m:t>
+                    </m:r>
+                    <m:r>
+                      <m:t>C</m:t>
+                    </m:r>
+                    <m:r>
+                      <m:t>Q</m:t>
+                    </m:r>
+                  </m:oMath>
+                </a14:m>
+              </mc:Choice>
+            </mc:AlternateContent>
+            <a:r>
+              <a:rPr lang="en-US" sz="4400" b="1">
+                <a:solidFill>
+                  <a:srgbClr val="FAD02C"/>
+                </a:solidFill>
+                <a:latin typeface="Arial"/>
+              </a:rPr>
+              <a:t> </a:t>
+            </a:r>
+            <a:r>
+              <a:rPr lang="en-US" sz="4400" b="1">
+                <a:solidFill>
+                  <a:srgbClr val="FAD02C"/>
+                </a:solidFill>
+                <a:latin typeface="Arial"/>
+              </a:rPr>
+              <a:t>Practice</a:t>
             </a:r>
           </a:p>
         </p:txBody>
@@ -3275,7 +3315,7 @@
                 </a:solidFill>
                 <a:latin typeface="Arial"/>
               </a:rPr>
-              <a:t>47 Questions  ·  For: Boards</a:t>
+              <a:t>45 Questions  ·  For: Boards</a:t>
             </a:r>
           </a:p>
         </p:txBody>
@@ -3475,15 +3515,51 @@
           </a:bodyPr>
           <a:lstStyle/>
           <a:p>
-            <a:pPr algn="l"/>
-            <a:r>
-              <a:rPr sz="1800" b="1">
-                <a:solidFill>
-                  <a:srgbClr val="FAD02C"/>
-                </a:solidFill>
-                <a:latin typeface="Arial"/>
-              </a:rPr>
-              <a:t>An α-particle, a proton, an electron and a neutron are moving with the same speed. Then the particle having shortest de Broglie wavelength is</a:t>
+            <a:pPr algn="l">
+              <a:defRPr sz="1800" b="1">
+                <a:solidFill>
+                  <a:srgbClr val="FAD02C"/>
+                </a:solidFill>
+                <a:latin typeface="Arial"/>
+              </a:defRPr>
+            </a:pPr>
+            <a:r>
+              <a:rPr lang="en-US" sz="1800" b="1">
+                <a:solidFill>
+                  <a:srgbClr val="FAD02C"/>
+                </a:solidFill>
+                <a:latin typeface="Arial"/>
+              </a:rPr>
+              <a:t>An</a:t>
+            </a:r>
+            <a:r>
+              <a:rPr lang="en-US" sz="1800" b="1">
+                <a:solidFill>
+                  <a:srgbClr val="FAD02C"/>
+                </a:solidFill>
+                <a:latin typeface="Arial"/>
+              </a:rPr>
+              <a:t> </a:t>
+            </a:r>
+            <mc:AlternateContent xmlns:mc="http://schemas.openxmlformats.org/markup-compatibility/2006" xmlns:a14="http://schemas.microsoft.com/office/drawing/2010/main">
+              <mc:Choice Requires="a14">
+                <a14:m>
+                  <m:oMath xmlns:m="http://schemas.openxmlformats.org/officeDocument/2006/math">
+                    <m:r>
+                      <m:t>α</m:t>
+                    </m:r>
+                  </m:oMath>
+                </a14:m>
+              </mc:Choice>
+            </mc:AlternateContent>
+            <a:r>
+              <a:rPr lang="en-US" sz="1800" b="1">
+                <a:solidFill>
+                  <a:srgbClr val="FAD02C"/>
+                </a:solidFill>
+                <a:latin typeface="Arial"/>
+              </a:rPr>
+              <a:t>-particle, a proton, an electron and a neutron are moving with the same speed. Then the particle having shortest de Broglie wavelength is</a:t>
             </a:r>
           </a:p>
         </p:txBody>
@@ -3642,7 +3718,14 @@
           </a:bodyPr>
           <a:lstStyle/>
           <a:p>
-            <a:pPr algn="l"/>
+            <a:pPr algn="l">
+              <a:defRPr sz="1600">
+                <a:solidFill>
+                  <a:srgbClr val="F0F0F0"/>
+                </a:solidFill>
+                <a:latin typeface="Arial"/>
+              </a:defRPr>
+            </a:pPr>
             <a:r>
               <a:rPr b="1" sz="1600">
                 <a:solidFill>
@@ -3652,14 +3735,25 @@
               </a:rPr>
               <a:t>D. </a:t>
             </a:r>
-            <a:r>
-              <a:rPr sz="1600" b="0">
+            <mc:AlternateContent xmlns:mc="http://schemas.openxmlformats.org/markup-compatibility/2006" xmlns:a14="http://schemas.microsoft.com/office/drawing/2010/main">
+              <mc:Choice Requires="a14">
+                <a14:m>
+                  <m:oMath xmlns:m="http://schemas.openxmlformats.org/officeDocument/2006/math">
+                    <m:r>
+                      <m:t>α</m:t>
+                    </m:r>
+                  </m:oMath>
+                </a14:m>
+              </mc:Choice>
+            </mc:AlternateContent>
+            <a:r>
+              <a:rPr lang="en-US" sz="1600">
                 <a:solidFill>
                   <a:srgbClr val="F0F0F0"/>
                 </a:solidFill>
                 <a:latin typeface="Arial"/>
               </a:rPr>
-              <a:t>α-particle.</a:t>
+              <a:t>-particle.</a:t>
             </a:r>
           </a:p>
         </p:txBody>
@@ -4483,15 +4577,84 @@
           </a:bodyPr>
           <a:lstStyle/>
           <a:p>
-            <a:pPr algn="l"/>
-            <a:r>
-              <a:rPr sz="1800" b="1">
-                <a:solidFill>
-                  <a:srgbClr val="FAD02C"/>
-                </a:solidFill>
-                <a:latin typeface="Arial"/>
-              </a:rPr>
-              <a:t>What is the conclusion of Davison and Germar exp eriment on the nature of electron?</a:t>
+            <a:pPr algn="l">
+              <a:defRPr sz="1800" b="1">
+                <a:solidFill>
+                  <a:srgbClr val="FAD02C"/>
+                </a:solidFill>
+                <a:latin typeface="Arial"/>
+              </a:defRPr>
+            </a:pPr>
+            <a:r>
+              <a:rPr lang="en-US" sz="1800" b="1">
+                <a:solidFill>
+                  <a:srgbClr val="FAD02C"/>
+                </a:solidFill>
+                <a:latin typeface="Arial"/>
+              </a:rPr>
+              <a:t>What is the conclusion of Davison and Germar</a:t>
+            </a:r>
+            <a:r>
+              <a:rPr lang="en-US" sz="1800" b="1">
+                <a:solidFill>
+                  <a:srgbClr val="FAD02C"/>
+                </a:solidFill>
+                <a:latin typeface="Arial"/>
+              </a:rPr>
+              <a:t> </a:t>
+            </a:r>
+            <mc:AlternateContent xmlns:mc="http://schemas.openxmlformats.org/markup-compatibility/2006" xmlns:a14="http://schemas.microsoft.com/office/drawing/2010/main">
+              <mc:Choice Requires="a14">
+                <a14:m>
+                  <m:oMath xmlns:m="http://schemas.openxmlformats.org/officeDocument/2006/math">
+                    <m:r>
+                      <m:rPr>
+                        <m:sty m:val="p"/>
+                      </m:rPr>
+                      <m:t>exp</m:t>
+                    </m:r>
+                    <m:r>
+                      <m:t>e</m:t>
+                    </m:r>
+                    <m:r>
+                      <m:t>r</m:t>
+                    </m:r>
+                    <m:r>
+                      <m:t>i</m:t>
+                    </m:r>
+                    <m:r>
+                      <m:t>m</m:t>
+                    </m:r>
+                    <m:r>
+                      <m:t>e</m:t>
+                    </m:r>
+                    <m:r>
+                      <m:t>n</m:t>
+                    </m:r>
+                    <m:r>
+                      <m:t>t</m:t>
+                    </m:r>
+                  </m:oMath>
+                </a14:m>
+              </mc:Choice>
+            </mc:AlternateContent>
+            <a:r>
+              <a:rPr lang="en-US" sz="1800" b="1">
+                <a:solidFill>
+                  <a:srgbClr val="FAD02C"/>
+                </a:solidFill>
+                <a:latin typeface="Arial"/>
+              </a:rPr>
+              <a:t> </a:t>
+            </a:r>
+            <a:r>
+              <a:rPr lang="en-US" sz="1800" b="1">
+                <a:solidFill>
+                  <a:srgbClr val="FAD02C"/>
+                </a:solidFill>
+                <a:latin typeface="Arial"/>
+              </a:rPr>
+              <a:t>on the nature of electron?</a:t>
             </a:r>
           </a:p>
         </p:txBody>
@@ -5315,15 +5478,84 @@
           </a:bodyPr>
           <a:lstStyle/>
           <a:p>
-            <a:pPr algn="l"/>
-            <a:r>
-              <a:rPr sz="1800" b="1">
-                <a:solidFill>
-                  <a:srgbClr val="FAD02C"/>
-                </a:solidFill>
-                <a:latin typeface="Arial"/>
-              </a:rPr>
-              <a:t>Write the exp ression for the de Broglie wavelength of a particle of mass m moving with a speed v.</a:t>
+            <a:pPr algn="l">
+              <a:defRPr sz="1800" b="1">
+                <a:solidFill>
+                  <a:srgbClr val="FAD02C"/>
+                </a:solidFill>
+                <a:latin typeface="Arial"/>
+              </a:defRPr>
+            </a:pPr>
+            <a:r>
+              <a:rPr lang="en-US" sz="1800" b="1">
+                <a:solidFill>
+                  <a:srgbClr val="FAD02C"/>
+                </a:solidFill>
+                <a:latin typeface="Arial"/>
+              </a:rPr>
+              <a:t>Write the</a:t>
+            </a:r>
+            <a:r>
+              <a:rPr lang="en-US" sz="1800" b="1">
+                <a:solidFill>
+                  <a:srgbClr val="FAD02C"/>
+                </a:solidFill>
+                <a:latin typeface="Arial"/>
+              </a:rPr>
+              <a:t> </a:t>
+            </a:r>
+            <mc:AlternateContent xmlns:mc="http://schemas.openxmlformats.org/markup-compatibility/2006" xmlns:a14="http://schemas.microsoft.com/office/drawing/2010/main">
+              <mc:Choice Requires="a14">
+                <a14:m>
+                  <m:oMath xmlns:m="http://schemas.openxmlformats.org/officeDocument/2006/math">
+                    <m:r>
+                      <m:rPr>
+                        <m:sty m:val="p"/>
+                      </m:rPr>
+                      <m:t>exp</m:t>
+                    </m:r>
+                    <m:r>
+                      <m:t>r</m:t>
+                    </m:r>
+                    <m:r>
+                      <m:t>e</m:t>
+                    </m:r>
+                    <m:r>
+                      <m:t>s</m:t>
+                    </m:r>
+                    <m:r>
+                      <m:t>s</m:t>
+                    </m:r>
+                    <m:r>
+                      <m:t>i</m:t>
+                    </m:r>
+                    <m:r>
+                      <m:t>o</m:t>
+                    </m:r>
+                    <m:r>
+                      <m:t>n</m:t>
+                    </m:r>
+                  </m:oMath>
+                </a14:m>
+              </mc:Choice>
+            </mc:AlternateContent>
+            <a:r>
+              <a:rPr lang="en-US" sz="1800" b="1">
+                <a:solidFill>
+                  <a:srgbClr val="FAD02C"/>
+                </a:solidFill>
+                <a:latin typeface="Arial"/>
+              </a:rPr>
+              <a:t> </a:t>
+            </a:r>
+            <a:r>
+              <a:rPr lang="en-US" sz="1800" b="1">
+                <a:solidFill>
+                  <a:srgbClr val="FAD02C"/>
+                </a:solidFill>
+                <a:latin typeface="Arial"/>
+              </a:rPr>
+              <a:t>for the de Broglie wavelength of a particle of mass m moving with a speed v.</a:t>
             </a:r>
           </a:p>
         </p:txBody>
@@ -5731,15 +5963,133 @@
           </a:bodyPr>
           <a:lstStyle/>
           <a:p>
-            <a:pPr algn="l"/>
-            <a:r>
-              <a:rPr sz="1800" b="1">
-                <a:solidFill>
-                  <a:srgbClr val="FAD02C"/>
-                </a:solidFill>
-                <a:latin typeface="Arial"/>
-              </a:rPr>
-              <a:t>In photoelectric exp eriment, increase in the intensity of light (ν&gt;ν0)</a:t>
+            <a:pPr algn="l">
+              <a:defRPr sz="1800" b="1">
+                <a:solidFill>
+                  <a:srgbClr val="FAD02C"/>
+                </a:solidFill>
+                <a:latin typeface="Arial"/>
+              </a:defRPr>
+            </a:pPr>
+            <a:r>
+              <a:rPr lang="en-US" sz="1800" b="1">
+                <a:solidFill>
+                  <a:srgbClr val="FAD02C"/>
+                </a:solidFill>
+                <a:latin typeface="Arial"/>
+              </a:rPr>
+              <a:t>In photoelectric</a:t>
+            </a:r>
+            <a:r>
+              <a:rPr lang="en-US" sz="1800" b="1">
+                <a:solidFill>
+                  <a:srgbClr val="FAD02C"/>
+                </a:solidFill>
+                <a:latin typeface="Arial"/>
+              </a:rPr>
+              <a:t> </a:t>
+            </a:r>
+            <mc:AlternateContent xmlns:mc="http://schemas.openxmlformats.org/markup-compatibility/2006" xmlns:a14="http://schemas.microsoft.com/office/drawing/2010/main">
+              <mc:Choice Requires="a14">
+                <a14:m>
+                  <m:oMath xmlns:m="http://schemas.openxmlformats.org/officeDocument/2006/math">
+                    <m:r>
+                      <m:rPr>
+                        <m:sty m:val="p"/>
+                      </m:rPr>
+                      <m:t>exp</m:t>
+                    </m:r>
+                    <m:r>
+                      <m:t>e</m:t>
+                    </m:r>
+                    <m:r>
+                      <m:t>r</m:t>
+                    </m:r>
+                    <m:r>
+                      <m:t>i</m:t>
+                    </m:r>
+                    <m:r>
+                      <m:t>m</m:t>
+                    </m:r>
+                    <m:r>
+                      <m:t>e</m:t>
+                    </m:r>
+                    <m:r>
+                      <m:t>n</m:t>
+                    </m:r>
+                    <m:r>
+                      <m:t>t</m:t>
+                    </m:r>
+                    <m:r>
+                      <m:rPr>
+                        <m:sty m:val="p"/>
+                      </m:rPr>
+                      <m:t>,</m:t>
+                    </m:r>
+                  </m:oMath>
+                </a14:m>
+              </mc:Choice>
+            </mc:AlternateContent>
+            <a:r>
+              <a:rPr lang="en-US" sz="1800" b="1">
+                <a:solidFill>
+                  <a:srgbClr val="FAD02C"/>
+                </a:solidFill>
+                <a:latin typeface="Arial"/>
+              </a:rPr>
+              <a:t> </a:t>
+            </a:r>
+            <a:r>
+              <a:rPr lang="en-US" sz="1800" b="1">
+                <a:solidFill>
+                  <a:srgbClr val="FAD02C"/>
+                </a:solidFill>
+                <a:latin typeface="Arial"/>
+              </a:rPr>
+              <a:t>increase in the intensity of light (</a:t>
+            </a:r>
+            <mc:AlternateContent xmlns:mc="http://schemas.openxmlformats.org/markup-compatibility/2006" xmlns:a14="http://schemas.microsoft.com/office/drawing/2010/main">
+              <mc:Choice Requires="a14">
+                <a14:m>
+                  <m:oMath xmlns:m="http://schemas.openxmlformats.org/officeDocument/2006/math">
+                    <m:r>
+                      <m:t>ν</m:t>
+                    </m:r>
+                  </m:oMath>
+                </a14:m>
+              </mc:Choice>
+            </mc:AlternateContent>
+            <a:r>
+              <a:rPr lang="en-US" sz="1800" b="1">
+                <a:solidFill>
+                  <a:srgbClr val="FAD02C"/>
+                </a:solidFill>
+                <a:latin typeface="Arial"/>
+              </a:rPr>
+              <a:t>&gt;</a:t>
+            </a:r>
+            <mc:AlternateContent xmlns:mc="http://schemas.openxmlformats.org/markup-compatibility/2006" xmlns:a14="http://schemas.microsoft.com/office/drawing/2010/main">
+              <mc:Choice Requires="a14">
+                <a14:m>
+                  <m:oMath xmlns:m="http://schemas.openxmlformats.org/officeDocument/2006/math">
+                    <m:r>
+                      <m:t>ν</m:t>
+                    </m:r>
+                    <m:r>
+                      <m:t>0</m:t>
+                    </m:r>
+                  </m:oMath>
+                </a14:m>
+              </mc:Choice>
+            </mc:AlternateContent>
+            <a:r>
+              <a:rPr lang="en-US" sz="1800" b="1">
+                <a:solidFill>
+                  <a:srgbClr val="FAD02C"/>
+                </a:solidFill>
+                <a:latin typeface="Arial"/>
+              </a:rPr>
+              <a:t>)</a:t>
             </a:r>
           </a:p>
         </p:txBody>
@@ -6331,7 +6681,9 @@
                 </a:solidFill>
                 <a:latin typeface="Arial"/>
               </a:rPr>
-              <a:t>Define: Photoelectric work function Electron volt(ev)</a:t>
+              <a:t>Define:
+Photoelectric work function
+Electron volt(ev)</a:t>
             </a:r>
           </a:p>
         </p:txBody>
@@ -6739,15 +7091,137 @@
           </a:bodyPr>
           <a:lstStyle/>
           <a:p>
-            <a:pPr algn="l"/>
-            <a:r>
-              <a:rPr sz="1800" b="1">
-                <a:solidFill>
-                  <a:srgbClr val="FAD02C"/>
-                </a:solidFill>
-                <a:latin typeface="Arial"/>
-              </a:rPr>
-              <a:t>Write the exp ression for de-Broglie wave length of electrons in terms of electric potential and exp lain the terms used.</a:t>
+            <a:pPr algn="l">
+              <a:defRPr sz="1800" b="1">
+                <a:solidFill>
+                  <a:srgbClr val="FAD02C"/>
+                </a:solidFill>
+                <a:latin typeface="Arial"/>
+              </a:defRPr>
+            </a:pPr>
+            <a:r>
+              <a:rPr lang="en-US" sz="1800" b="1">
+                <a:solidFill>
+                  <a:srgbClr val="FAD02C"/>
+                </a:solidFill>
+                <a:latin typeface="Arial"/>
+              </a:rPr>
+              <a:t>Write the</a:t>
+            </a:r>
+            <a:r>
+              <a:rPr lang="en-US" sz="1800" b="1">
+                <a:solidFill>
+                  <a:srgbClr val="FAD02C"/>
+                </a:solidFill>
+                <a:latin typeface="Arial"/>
+              </a:rPr>
+              <a:t> </a:t>
+            </a:r>
+            <mc:AlternateContent xmlns:mc="http://schemas.openxmlformats.org/markup-compatibility/2006" xmlns:a14="http://schemas.microsoft.com/office/drawing/2010/main">
+              <mc:Choice Requires="a14">
+                <a14:m>
+                  <m:oMath xmlns:m="http://schemas.openxmlformats.org/officeDocument/2006/math">
+                    <m:r>
+                      <m:rPr>
+                        <m:sty m:val="p"/>
+                      </m:rPr>
+                      <m:t>exp</m:t>
+                    </m:r>
+                    <m:r>
+                      <m:t>r</m:t>
+                    </m:r>
+                    <m:r>
+                      <m:t>e</m:t>
+                    </m:r>
+                    <m:r>
+                      <m:t>s</m:t>
+                    </m:r>
+                    <m:r>
+                      <m:t>s</m:t>
+                    </m:r>
+                    <m:r>
+                      <m:t>i</m:t>
+                    </m:r>
+                    <m:r>
+                      <m:t>o</m:t>
+                    </m:r>
+                    <m:r>
+                      <m:t>n</m:t>
+                    </m:r>
+                  </m:oMath>
+                </a14:m>
+              </mc:Choice>
+            </mc:AlternateContent>
+            <a:r>
+              <a:rPr lang="en-US" sz="1800" b="1">
+                <a:solidFill>
+                  <a:srgbClr val="FAD02C"/>
+                </a:solidFill>
+                <a:latin typeface="Arial"/>
+              </a:rPr>
+              <a:t> </a:t>
+            </a:r>
+            <a:r>
+              <a:rPr lang="en-US" sz="1800" b="1">
+                <a:solidFill>
+                  <a:srgbClr val="FAD02C"/>
+                </a:solidFill>
+                <a:latin typeface="Arial"/>
+              </a:rPr>
+              <a:t>for de-Broglie wave length of electrons in terms of electric potential and</a:t>
+            </a:r>
+            <a:r>
+              <a:rPr lang="en-US" sz="1800" b="1">
+                <a:solidFill>
+                  <a:srgbClr val="FAD02C"/>
+                </a:solidFill>
+                <a:latin typeface="Arial"/>
+              </a:rPr>
+              <a:t> </a:t>
+            </a:r>
+            <mc:AlternateContent xmlns:mc="http://schemas.openxmlformats.org/markup-compatibility/2006" xmlns:a14="http://schemas.microsoft.com/office/drawing/2010/main">
+              <mc:Choice Requires="a14">
+                <a14:m>
+                  <m:oMath xmlns:m="http://schemas.openxmlformats.org/officeDocument/2006/math">
+                    <m:r>
+                      <m:rPr>
+                        <m:sty m:val="p"/>
+                      </m:rPr>
+                      <m:t>exp</m:t>
+                    </m:r>
+                    <m:r>
+                      <m:t>l</m:t>
+                    </m:r>
+                    <m:r>
+                      <m:t>a</m:t>
+                    </m:r>
+                    <m:r>
+                      <m:t>i</m:t>
+                    </m:r>
+                    <m:r>
+                      <m:t>n</m:t>
+                    </m:r>
+                  </m:oMath>
+                </a14:m>
+              </mc:Choice>
+            </mc:AlternateContent>
+            <a:r>
+              <a:rPr lang="en-US" sz="1800" b="1">
+                <a:solidFill>
+                  <a:srgbClr val="FAD02C"/>
+                </a:solidFill>
+                <a:latin typeface="Arial"/>
+              </a:rPr>
+              <a:t> </a:t>
+            </a:r>
+            <a:r>
+              <a:rPr lang="en-US" sz="1800" b="1">
+                <a:solidFill>
+                  <a:srgbClr val="FAD02C"/>
+                </a:solidFill>
+                <a:latin typeface="Arial"/>
+              </a:rPr>
+              <a:t>the terms used.</a:t>
             </a:r>
           </a:p>
         </p:txBody>
@@ -7363,15 +7837,137 @@
           </a:bodyPr>
           <a:lstStyle/>
           <a:p>
-            <a:pPr algn="l"/>
-            <a:r>
-              <a:rPr sz="1800" b="1">
-                <a:solidFill>
-                  <a:srgbClr val="FAD02C"/>
-                </a:solidFill>
-                <a:latin typeface="Arial"/>
-              </a:rPr>
-              <a:t>What are matter waves? Write the exp ression for De-Broglie wavelength of a particle and exp lain the terms</a:t>
+            <a:pPr algn="l">
+              <a:defRPr sz="1800" b="1">
+                <a:solidFill>
+                  <a:srgbClr val="FAD02C"/>
+                </a:solidFill>
+                <a:latin typeface="Arial"/>
+              </a:defRPr>
+            </a:pPr>
+            <a:r>
+              <a:rPr lang="en-US" sz="1800" b="1">
+                <a:solidFill>
+                  <a:srgbClr val="FAD02C"/>
+                </a:solidFill>
+                <a:latin typeface="Arial"/>
+              </a:rPr>
+              <a:t>What are matter waves? Write the</a:t>
+            </a:r>
+            <a:r>
+              <a:rPr lang="en-US" sz="1800" b="1">
+                <a:solidFill>
+                  <a:srgbClr val="FAD02C"/>
+                </a:solidFill>
+                <a:latin typeface="Arial"/>
+              </a:rPr>
+              <a:t> </a:t>
+            </a:r>
+            <mc:AlternateContent xmlns:mc="http://schemas.openxmlformats.org/markup-compatibility/2006" xmlns:a14="http://schemas.microsoft.com/office/drawing/2010/main">
+              <mc:Choice Requires="a14">
+                <a14:m>
+                  <m:oMath xmlns:m="http://schemas.openxmlformats.org/officeDocument/2006/math">
+                    <m:r>
+                      <m:rPr>
+                        <m:sty m:val="p"/>
+                      </m:rPr>
+                      <m:t>exp</m:t>
+                    </m:r>
+                    <m:r>
+                      <m:t>r</m:t>
+                    </m:r>
+                    <m:r>
+                      <m:t>e</m:t>
+                    </m:r>
+                    <m:r>
+                      <m:t>s</m:t>
+                    </m:r>
+                    <m:r>
+                      <m:t>s</m:t>
+                    </m:r>
+                    <m:r>
+                      <m:t>i</m:t>
+                    </m:r>
+                    <m:r>
+                      <m:t>o</m:t>
+                    </m:r>
+                    <m:r>
+                      <m:t>n</m:t>
+                    </m:r>
+                  </m:oMath>
+                </a14:m>
+              </mc:Choice>
+            </mc:AlternateContent>
+            <a:r>
+              <a:rPr lang="en-US" sz="1800" b="1">
+                <a:solidFill>
+                  <a:srgbClr val="FAD02C"/>
+                </a:solidFill>
+                <a:latin typeface="Arial"/>
+              </a:rPr>
+              <a:t> </a:t>
+            </a:r>
+            <a:r>
+              <a:rPr lang="en-US" sz="1800" b="1">
+                <a:solidFill>
+                  <a:srgbClr val="FAD02C"/>
+                </a:solidFill>
+                <a:latin typeface="Arial"/>
+              </a:rPr>
+              <a:t>for De-Broglie wavelength of a particle and</a:t>
+            </a:r>
+            <a:r>
+              <a:rPr lang="en-US" sz="1800" b="1">
+                <a:solidFill>
+                  <a:srgbClr val="FAD02C"/>
+                </a:solidFill>
+                <a:latin typeface="Arial"/>
+              </a:rPr>
+              <a:t> </a:t>
+            </a:r>
+            <mc:AlternateContent xmlns:mc="http://schemas.openxmlformats.org/markup-compatibility/2006" xmlns:a14="http://schemas.microsoft.com/office/drawing/2010/main">
+              <mc:Choice Requires="a14">
+                <a14:m>
+                  <m:oMath xmlns:m="http://schemas.openxmlformats.org/officeDocument/2006/math">
+                    <m:r>
+                      <m:rPr>
+                        <m:sty m:val="p"/>
+                      </m:rPr>
+                      <m:t>exp</m:t>
+                    </m:r>
+                    <m:r>
+                      <m:t>l</m:t>
+                    </m:r>
+                    <m:r>
+                      <m:t>a</m:t>
+                    </m:r>
+                    <m:r>
+                      <m:t>i</m:t>
+                    </m:r>
+                    <m:r>
+                      <m:t>n</m:t>
+                    </m:r>
+                  </m:oMath>
+                </a14:m>
+              </mc:Choice>
+            </mc:AlternateContent>
+            <a:r>
+              <a:rPr lang="en-US" sz="1800" b="1">
+                <a:solidFill>
+                  <a:srgbClr val="FAD02C"/>
+                </a:solidFill>
+                <a:latin typeface="Arial"/>
+              </a:rPr>
+              <a:t> </a:t>
+            </a:r>
+            <a:r>
+              <a:rPr lang="en-US" sz="1800" b="1">
+                <a:solidFill>
+                  <a:srgbClr val="FAD02C"/>
+                </a:solidFill>
+                <a:latin typeface="Arial"/>
+              </a:rPr>
+              <a:t>the terms</a:t>
             </a:r>
           </a:p>
         </p:txBody>
@@ -7571,15 +8167,90 @@
           </a:bodyPr>
           <a:lstStyle/>
           <a:p>
-            <a:pPr algn="l"/>
-            <a:r>
-              <a:rPr sz="1800" b="1">
-                <a:solidFill>
-                  <a:srgbClr val="FAD02C"/>
-                </a:solidFill>
-                <a:latin typeface="Arial"/>
-              </a:rPr>
-              <a:t>Write the exp erimental observations of photo electric effect.</a:t>
+            <a:pPr algn="l">
+              <a:defRPr sz="1800" b="1">
+                <a:solidFill>
+                  <a:srgbClr val="FAD02C"/>
+                </a:solidFill>
+                <a:latin typeface="Arial"/>
+              </a:defRPr>
+            </a:pPr>
+            <a:r>
+              <a:rPr lang="en-US" sz="1800" b="1">
+                <a:solidFill>
+                  <a:srgbClr val="FAD02C"/>
+                </a:solidFill>
+                <a:latin typeface="Arial"/>
+              </a:rPr>
+              <a:t>Write the</a:t>
+            </a:r>
+            <a:r>
+              <a:rPr lang="en-US" sz="1800" b="1">
+                <a:solidFill>
+                  <a:srgbClr val="FAD02C"/>
+                </a:solidFill>
+                <a:latin typeface="Arial"/>
+              </a:rPr>
+              <a:t> </a:t>
+            </a:r>
+            <mc:AlternateContent xmlns:mc="http://schemas.openxmlformats.org/markup-compatibility/2006" xmlns:a14="http://schemas.microsoft.com/office/drawing/2010/main">
+              <mc:Choice Requires="a14">
+                <a14:m>
+                  <m:oMath xmlns:m="http://schemas.openxmlformats.org/officeDocument/2006/math">
+                    <m:r>
+                      <m:rPr>
+                        <m:sty m:val="p"/>
+                      </m:rPr>
+                      <m:t>exp</m:t>
+                    </m:r>
+                    <m:r>
+                      <m:t>e</m:t>
+                    </m:r>
+                    <m:r>
+                      <m:t>r</m:t>
+                    </m:r>
+                    <m:r>
+                      <m:t>i</m:t>
+                    </m:r>
+                    <m:r>
+                      <m:t>m</m:t>
+                    </m:r>
+                    <m:r>
+                      <m:t>e</m:t>
+                    </m:r>
+                    <m:r>
+                      <m:t>n</m:t>
+                    </m:r>
+                    <m:r>
+                      <m:t>t</m:t>
+                    </m:r>
+                    <m:r>
+                      <m:t>a</m:t>
+                    </m:r>
+                    <m:r>
+                      <m:t>l</m:t>
+                    </m:r>
+                  </m:oMath>
+                </a14:m>
+              </mc:Choice>
+            </mc:AlternateContent>
+            <a:r>
+              <a:rPr lang="en-US" sz="1800" b="1">
+                <a:solidFill>
+                  <a:srgbClr val="FAD02C"/>
+                </a:solidFill>
+                <a:latin typeface="Arial"/>
+              </a:rPr>
+              <a:t> </a:t>
+            </a:r>
+            <a:r>
+              <a:rPr lang="en-US" sz="1800" b="1">
+                <a:solidFill>
+                  <a:srgbClr val="FAD02C"/>
+                </a:solidFill>
+                <a:latin typeface="Arial"/>
+              </a:rPr>
+              <a:t>observations of photo electric effect.</a:t>
             </a:r>
           </a:p>
         </p:txBody>
@@ -7987,15 +8658,244 @@
           </a:bodyPr>
           <a:lstStyle/>
           <a:p>
-            <a:pPr algn="l"/>
-            <a:r>
-              <a:rPr sz="1800" b="1">
-                <a:solidFill>
-                  <a:srgbClr val="FAD02C"/>
-                </a:solidFill>
-                <a:latin typeface="Arial"/>
-              </a:rPr>
-              <a:t>Calculate de Broglie wavelength associated with an electron moving with a speed of 2 ×105ms⁻¹. Given h = 6.625 ×10⁻³⁴JS, m = 9.11 ×10⁻³¹ kg.</a:t>
+            <a:pPr algn="l">
+              <a:defRPr sz="1800" b="1">
+                <a:solidFill>
+                  <a:srgbClr val="FAD02C"/>
+                </a:solidFill>
+                <a:latin typeface="Arial"/>
+              </a:defRPr>
+            </a:pPr>
+            <a:r>
+              <a:rPr lang="en-US" sz="1800" b="1">
+                <a:solidFill>
+                  <a:srgbClr val="FAD02C"/>
+                </a:solidFill>
+                <a:latin typeface="Arial"/>
+              </a:rPr>
+              <a:t>Calculate de Broglie wavelength associated with an electron moving with a speed of</a:t>
+            </a:r>
+            <a:r>
+              <a:rPr lang="en-US" sz="1800" b="1">
+                <a:solidFill>
+                  <a:srgbClr val="FAD02C"/>
+                </a:solidFill>
+                <a:latin typeface="Arial"/>
+              </a:rPr>
+              <a:t> </a:t>
+            </a:r>
+            <mc:AlternateContent xmlns:mc="http://schemas.openxmlformats.org/markup-compatibility/2006" xmlns:a14="http://schemas.microsoft.com/office/drawing/2010/main">
+              <mc:Choice Requires="a14">
+                <a14:m>
+                  <m:oMath xmlns:m="http://schemas.openxmlformats.org/officeDocument/2006/math">
+                    <m:r>
+                      <m:t>2</m:t>
+                    </m:r>
+                    <m:r>
+                      <m:rPr>
+                        <m:sty m:val="p"/>
+                      </m:rPr>
+                      <m:t>×</m:t>
+                    </m:r>
+                    <m:r>
+                      <m:t>105</m:t>
+                    </m:r>
+                    <m:r>
+                      <m:t>m</m:t>
+                    </m:r>
+                    <m:sSup>
+                      <m:e>
+                        <m:r>
+                          <m:t>s</m:t>
+                        </m:r>
+                      </m:e>
+                      <m:sup>
+                        <m:r>
+                          <m:rPr>
+                            <m:sty m:val="p"/>
+                          </m:rPr>
+                          <m:t>−</m:t>
+                        </m:r>
+                        <m:r>
+                          <m:t>1</m:t>
+                        </m:r>
+                      </m:sup>
+                    </m:sSup>
+                    <m:r>
+                      <m:rPr>
+                        <m:sty m:val="p"/>
+                      </m:rPr>
+                      <m:t>.</m:t>
+                    </m:r>
+                  </m:oMath>
+                </a14:m>
+              </mc:Choice>
+            </mc:AlternateContent>
+            <a:r>
+              <a:rPr lang="en-US" sz="1800" b="1">
+                <a:solidFill>
+                  <a:srgbClr val="FAD02C"/>
+                </a:solidFill>
+                <a:latin typeface="Arial"/>
+              </a:rPr>
+              <a:t> </a:t>
+            </a:r>
+            <a:r>
+              <a:rPr lang="en-US" sz="1800" b="1">
+                <a:solidFill>
+                  <a:srgbClr val="FAD02C"/>
+                </a:solidFill>
+                <a:latin typeface="Arial"/>
+              </a:rPr>
+              <a:t>Given h</a:t>
+            </a:r>
+            <a:r>
+              <a:rPr lang="en-US" sz="1800" b="1">
+                <a:solidFill>
+                  <a:srgbClr val="FAD02C"/>
+                </a:solidFill>
+                <a:latin typeface="Arial"/>
+              </a:rPr>
+              <a:t> </a:t>
+            </a:r>
+            <mc:AlternateContent xmlns:mc="http://schemas.openxmlformats.org/markup-compatibility/2006" xmlns:a14="http://schemas.microsoft.com/office/drawing/2010/main">
+              <mc:Choice Requires="a14">
+                <a14:m>
+                  <m:oMath xmlns:m="http://schemas.openxmlformats.org/officeDocument/2006/math">
+                    <m:r>
+                      <m:rPr>
+                        <m:sty m:val="p"/>
+                      </m:rPr>
+                      <m:t>=</m:t>
+                    </m:r>
+                    <m:r>
+                      <m:t>6.625</m:t>
+                    </m:r>
+                    <m:r>
+                      <m:rPr>
+                        <m:sty m:val="p"/>
+                      </m:rPr>
+                      <m:t>×</m:t>
+                    </m:r>
+                    <m:sSup>
+                      <m:e>
+                        <m:r>
+                          <m:t>10</m:t>
+                        </m:r>
+                      </m:e>
+                      <m:sup>
+                        <m:r>
+                          <m:rPr>
+                            <m:sty m:val="p"/>
+                          </m:rPr>
+                          <m:t>−</m:t>
+                        </m:r>
+                        <m:r>
+                          <m:t>34</m:t>
+                        </m:r>
+                      </m:sup>
+                    </m:sSup>
+                    <m:r>
+                      <m:t>J</m:t>
+                    </m:r>
+                    <m:r>
+                      <m:t>S</m:t>
+                    </m:r>
+                    <m:r>
+                      <m:rPr>
+                        <m:sty m:val="p"/>
+                      </m:rPr>
+                      <m:t>,</m:t>
+                    </m:r>
+                  </m:oMath>
+                </a14:m>
+              </mc:Choice>
+            </mc:AlternateContent>
+            <a:r>
+              <a:rPr lang="en-US" sz="1800" b="1">
+                <a:solidFill>
+                  <a:srgbClr val="FAD02C"/>
+                </a:solidFill>
+                <a:latin typeface="Arial"/>
+              </a:rPr>
+              <a:t> </a:t>
+            </a:r>
+            <a:r>
+              <a:rPr lang="en-US" sz="1800" b="1">
+                <a:solidFill>
+                  <a:srgbClr val="FAD02C"/>
+                </a:solidFill>
+                <a:latin typeface="Arial"/>
+              </a:rPr>
+              <a:t>m</a:t>
+            </a:r>
+            <a:r>
+              <a:rPr lang="en-US" sz="1800" b="1">
+                <a:solidFill>
+                  <a:srgbClr val="FAD02C"/>
+                </a:solidFill>
+                <a:latin typeface="Arial"/>
+              </a:rPr>
+              <a:t> </a:t>
+            </a:r>
+            <mc:AlternateContent xmlns:mc="http://schemas.openxmlformats.org/markup-compatibility/2006" xmlns:a14="http://schemas.microsoft.com/office/drawing/2010/main">
+              <mc:Choice Requires="a14">
+                <a14:m>
+                  <m:oMath xmlns:m="http://schemas.openxmlformats.org/officeDocument/2006/math">
+                    <m:r>
+                      <m:rPr>
+                        <m:sty m:val="p"/>
+                      </m:rPr>
+                      <m:t>=</m:t>
+                    </m:r>
+                    <m:r>
+                      <m:t>9.11</m:t>
+                    </m:r>
+                    <m:r>
+                      <m:rPr>
+                        <m:sty m:val="p"/>
+                      </m:rPr>
+                      <m:t>×</m:t>
+                    </m:r>
+                    <m:sSup>
+                      <m:e>
+                        <m:r>
+                          <m:t>10</m:t>
+                        </m:r>
+                      </m:e>
+                      <m:sup>
+                        <m:r>
+                          <m:rPr>
+                            <m:sty m:val="p"/>
+                          </m:rPr>
+                          <m:t>−</m:t>
+                        </m:r>
+                        <m:r>
+                          <m:t>31</m:t>
+                        </m:r>
+                      </m:sup>
+                    </m:sSup>
+                  </m:oMath>
+                </a14:m>
+              </mc:Choice>
+            </mc:AlternateContent>
+            <a:r>
+              <a:rPr lang="en-US" sz="1800" b="1">
+                <a:solidFill>
+                  <a:srgbClr val="FAD02C"/>
+                </a:solidFill>
+                <a:latin typeface="Arial"/>
+              </a:rPr>
+              <a:t> </a:t>
+            </a:r>
+            <a:r>
+              <a:rPr lang="en-US" sz="1800" b="1">
+                <a:solidFill>
+                  <a:srgbClr val="FAD02C"/>
+                </a:solidFill>
+                <a:latin typeface="Arial"/>
+              </a:rPr>
+              <a:t>kg.</a:t>
             </a:r>
           </a:p>
         </p:txBody>
@@ -8182,7 +9082,7 @@
         <p:spPr>
           <a:xfrm>
             <a:off x="457200" y="731520"/>
-            <a:ext cx="11274552" cy="913485"/>
+            <a:ext cx="11274552" cy="1217980"/>
           </a:xfrm>
           <a:prstGeom prst="rect">
             <a:avLst/>
@@ -8195,15 +9095,166 @@
           </a:bodyPr>
           <a:lstStyle/>
           <a:p>
-            <a:pPr algn="l"/>
-            <a:r>
-              <a:rPr sz="1800" b="1">
-                <a:solidFill>
-                  <a:srgbClr val="FAD02C"/>
-                </a:solidFill>
-                <a:latin typeface="Arial"/>
-              </a:rPr>
-              <a:t>The statements given below are related to the properties of photons: I. photons are electrically neutral.II. photons are undeflected by electric and magnetic fields.III. photons are light waves.IV. In photon particle collision, total energy and momentum are not conserved.</a:t>
+            <a:pPr algn="l">
+              <a:defRPr sz="1800" b="1">
+                <a:solidFill>
+                  <a:srgbClr val="FAD02C"/>
+                </a:solidFill>
+                <a:latin typeface="Arial"/>
+              </a:defRPr>
+            </a:pPr>
+            <a:r>
+              <a:rPr lang="en-US" sz="1800" b="1">
+                <a:solidFill>
+                  <a:srgbClr val="FAD02C"/>
+                </a:solidFill>
+                <a:latin typeface="Arial"/>
+              </a:rPr>
+              <a:t>The statements given below are related to the properties of photons: I. photons are electrically neutral.</a:t>
+            </a:r>
+            <a:r>
+              <a:rPr lang="en-US" sz="1800" b="1">
+                <a:solidFill>
+                  <a:srgbClr val="FAD02C"/>
+                </a:solidFill>
+                <a:latin typeface="Arial"/>
+              </a:rPr>
+              <a:t> </a:t>
+            </a:r>
+            <mc:AlternateContent xmlns:mc="http://schemas.openxmlformats.org/markup-compatibility/2006" xmlns:a14="http://schemas.microsoft.com/office/drawing/2010/main">
+              <mc:Choice Requires="a14">
+                <a14:m>
+                  <m:oMath xmlns:m="http://schemas.openxmlformats.org/officeDocument/2006/math">
+                    <m:r>
+                      <m:t>I</m:t>
+                    </m:r>
+                    <m:r>
+                      <m:t>I</m:t>
+                    </m:r>
+                    <m:r>
+                      <m:rPr>
+                        <m:sty m:val="p"/>
+                      </m:rPr>
+                      <m:t>.</m:t>
+                    </m:r>
+                  </m:oMath>
+                </a14:m>
+              </mc:Choice>
+            </mc:AlternateContent>
+            <a:r>
+              <a:rPr lang="en-US" sz="1800" b="1">
+                <a:solidFill>
+                  <a:srgbClr val="FAD02C"/>
+                </a:solidFill>
+                <a:latin typeface="Arial"/>
+              </a:rPr>
+              <a:t> </a:t>
+            </a:r>
+            <a:r>
+              <a:rPr lang="en-US" sz="1800" b="1">
+                <a:solidFill>
+                  <a:srgbClr val="FAD02C"/>
+                </a:solidFill>
+                <a:latin typeface="Arial"/>
+              </a:rPr>
+              <a:t>photons are undeflected by electric and magnetic fields.</a:t>
+            </a:r>
+            <a:r>
+              <a:rPr lang="en-US" sz="1800" b="1">
+                <a:solidFill>
+                  <a:srgbClr val="FAD02C"/>
+                </a:solidFill>
+                <a:latin typeface="Arial"/>
+              </a:rPr>
+              <a:t> </a:t>
+            </a:r>
+            <mc:AlternateContent xmlns:mc="http://schemas.openxmlformats.org/markup-compatibility/2006" xmlns:a14="http://schemas.microsoft.com/office/drawing/2010/main">
+              <mc:Choice Requires="a14">
+                <a14:m>
+                  <m:oMath xmlns:m="http://schemas.openxmlformats.org/officeDocument/2006/math">
+                    <m:r>
+                      <m:t>I</m:t>
+                    </m:r>
+                    <m:r>
+                      <m:t>I</m:t>
+                    </m:r>
+                    <m:r>
+                      <m:t>I</m:t>
+                    </m:r>
+                    <m:r>
+                      <m:rPr>
+                        <m:sty m:val="p"/>
+                      </m:rPr>
+                      <m:t>.</m:t>
+                    </m:r>
+                  </m:oMath>
+                </a14:m>
+              </mc:Choice>
+            </mc:AlternateContent>
+            <a:r>
+              <a:rPr lang="en-US" sz="1800" b="1">
+                <a:solidFill>
+                  <a:srgbClr val="FAD02C"/>
+                </a:solidFill>
+                <a:latin typeface="Arial"/>
+              </a:rPr>
+              <a:t> </a:t>
+            </a:r>
+            <a:r>
+              <a:rPr lang="en-US" sz="1800" b="1">
+                <a:solidFill>
+                  <a:srgbClr val="FAD02C"/>
+                </a:solidFill>
+                <a:latin typeface="Arial"/>
+              </a:rPr>
+              <a:t>photons are light waves.</a:t>
+            </a:r>
+            <a:r>
+              <a:rPr lang="en-US" sz="1800" b="1">
+                <a:solidFill>
+                  <a:srgbClr val="FAD02C"/>
+                </a:solidFill>
+                <a:latin typeface="Arial"/>
+              </a:rPr>
+              <a:t> </a:t>
+            </a:r>
+            <mc:AlternateContent xmlns:mc="http://schemas.openxmlformats.org/markup-compatibility/2006" xmlns:a14="http://schemas.microsoft.com/office/drawing/2010/main">
+              <mc:Choice Requires="a14">
+                <a14:m>
+                  <m:oMath xmlns:m="http://schemas.openxmlformats.org/officeDocument/2006/math">
+                    <m:r>
+                      <m:t>I</m:t>
+                    </m:r>
+                    <m:r>
+                      <m:t>V</m:t>
+                    </m:r>
+                    <m:r>
+                      <m:rPr>
+                        <m:sty m:val="p"/>
+                      </m:rPr>
+                      <m:t>.</m:t>
+                    </m:r>
+                  </m:oMath>
+                </a14:m>
+              </mc:Choice>
+            </mc:AlternateContent>
+            <a:r>
+              <a:rPr lang="en-US" sz="1800" b="1">
+                <a:solidFill>
+                  <a:srgbClr val="FAD02C"/>
+                </a:solidFill>
+                <a:latin typeface="Arial"/>
+              </a:rPr>
+              <a:t> </a:t>
+            </a:r>
+            <a:r>
+              <a:rPr lang="en-US" sz="1800" b="1">
+                <a:solidFill>
+                  <a:srgbClr val="FAD02C"/>
+                </a:solidFill>
+                <a:latin typeface="Arial"/>
+              </a:rPr>
+              <a:t>In photon particle collision, total energy and momentum are not conserved.</a:t>
             </a:r>
           </a:p>
         </p:txBody>
@@ -8216,7 +9267,7 @@
         </p:nvSpPr>
         <p:spPr>
           <a:xfrm>
-            <a:off x="457200" y="1809597"/>
+            <a:off x="457200" y="2114092"/>
             <a:ext cx="5477256" cy="457200"/>
           </a:xfrm>
           <a:prstGeom prst="rect">
@@ -8230,7 +9281,14 @@
           </a:bodyPr>
           <a:lstStyle/>
           <a:p>
-            <a:pPr algn="l"/>
+            <a:pPr algn="l">
+              <a:defRPr sz="1600">
+                <a:solidFill>
+                  <a:srgbClr val="F0F0F0"/>
+                </a:solidFill>
+                <a:latin typeface="Arial"/>
+              </a:defRPr>
+            </a:pPr>
             <a:r>
               <a:rPr b="1" sz="1600">
                 <a:solidFill>
@@ -8241,13 +9299,57 @@
               <a:t>A. </a:t>
             </a:r>
             <a:r>
-              <a:rPr sz="1600" b="0">
+              <a:rPr lang="en-US" sz="1600">
                 <a:solidFill>
                   <a:srgbClr val="F0F0F0"/>
                 </a:solidFill>
                 <a:latin typeface="Arial"/>
               </a:rPr>
-              <a:t>Only statements I and III are correct</a:t>
+              <a:t>Only statements I and</a:t>
+            </a:r>
+            <a:r>
+              <a:rPr lang="en-US" sz="1600">
+                <a:solidFill>
+                  <a:srgbClr val="F0F0F0"/>
+                </a:solidFill>
+                <a:latin typeface="Arial"/>
+              </a:rPr>
+              <a:t> </a:t>
+            </a:r>
+            <mc:AlternateContent xmlns:mc="http://schemas.openxmlformats.org/markup-compatibility/2006" xmlns:a14="http://schemas.microsoft.com/office/drawing/2010/main">
+              <mc:Choice Requires="a14">
+                <a14:m>
+                  <m:oMath xmlns:m="http://schemas.openxmlformats.org/officeDocument/2006/math">
+                    <m:r>
+                      <m:t>I</m:t>
+                    </m:r>
+                    <m:r>
+                      <m:t>I</m:t>
+                    </m:r>
+                    <m:r>
+                      <m:t>I</m:t>
+                    </m:r>
+                  </m:oMath>
+                </a14:m>
+              </mc:Choice>
+            </mc:AlternateContent>
+            <a:r>
+              <a:rPr lang="en-US" sz="1600">
+                <a:solidFill>
+                  <a:srgbClr val="F0F0F0"/>
+                </a:solidFill>
+                <a:latin typeface="Arial"/>
+              </a:rPr>
+              <a:t> </a:t>
+            </a:r>
+            <a:r>
+              <a:rPr lang="en-US" sz="1600">
+                <a:solidFill>
+                  <a:srgbClr val="F0F0F0"/>
+                </a:solidFill>
+                <a:latin typeface="Arial"/>
+              </a:rPr>
+              <a:t>are correct</a:t>
             </a:r>
           </a:p>
         </p:txBody>
@@ -8260,7 +9362,7 @@
         </p:nvSpPr>
         <p:spPr>
           <a:xfrm>
-            <a:off x="6254496" y="1809597"/>
+            <a:off x="6254496" y="2114092"/>
             <a:ext cx="5477256" cy="457200"/>
           </a:xfrm>
           <a:prstGeom prst="rect">
@@ -8274,7 +9376,14 @@
           </a:bodyPr>
           <a:lstStyle/>
           <a:p>
-            <a:pPr algn="l"/>
+            <a:pPr algn="l">
+              <a:defRPr sz="1600">
+                <a:solidFill>
+                  <a:srgbClr val="F0F0F0"/>
+                </a:solidFill>
+                <a:latin typeface="Arial"/>
+              </a:defRPr>
+            </a:pPr>
             <a:r>
               <a:rPr b="1" sz="1600">
                 <a:solidFill>
@@ -8285,13 +9394,95 @@
               <a:t>B. </a:t>
             </a:r>
             <a:r>
-              <a:rPr sz="1600" b="0">
+              <a:rPr lang="en-US" sz="1600">
                 <a:solidFill>
                   <a:srgbClr val="F0F0F0"/>
                 </a:solidFill>
                 <a:latin typeface="Arial"/>
               </a:rPr>
-              <a:t>Only statements II and IV are correct</a:t>
+              <a:t>Only statements</a:t>
+            </a:r>
+            <a:r>
+              <a:rPr lang="en-US" sz="1600">
+                <a:solidFill>
+                  <a:srgbClr val="F0F0F0"/>
+                </a:solidFill>
+                <a:latin typeface="Arial"/>
+              </a:rPr>
+              <a:t> </a:t>
+            </a:r>
+            <mc:AlternateContent xmlns:mc="http://schemas.openxmlformats.org/markup-compatibility/2006" xmlns:a14="http://schemas.microsoft.com/office/drawing/2010/main">
+              <mc:Choice Requires="a14">
+                <a14:m>
+                  <m:oMath xmlns:m="http://schemas.openxmlformats.org/officeDocument/2006/math">
+                    <m:r>
+                      <m:t>I</m:t>
+                    </m:r>
+                    <m:r>
+                      <m:t>I</m:t>
+                    </m:r>
+                  </m:oMath>
+                </a14:m>
+              </mc:Choice>
+            </mc:AlternateContent>
+            <a:r>
+              <a:rPr lang="en-US" sz="1600">
+                <a:solidFill>
+                  <a:srgbClr val="F0F0F0"/>
+                </a:solidFill>
+                <a:latin typeface="Arial"/>
+              </a:rPr>
+              <a:t> </a:t>
+            </a:r>
+            <a:r>
+              <a:rPr lang="en-US" sz="1600">
+                <a:solidFill>
+                  <a:srgbClr val="F0F0F0"/>
+                </a:solidFill>
+                <a:latin typeface="Arial"/>
+              </a:rPr>
+              <a:t>and</a:t>
+            </a:r>
+            <a:r>
+              <a:rPr lang="en-US" sz="1600">
+                <a:solidFill>
+                  <a:srgbClr val="F0F0F0"/>
+                </a:solidFill>
+                <a:latin typeface="Arial"/>
+              </a:rPr>
+              <a:t> </a:t>
+            </a:r>
+            <mc:AlternateContent xmlns:mc="http://schemas.openxmlformats.org/markup-compatibility/2006" xmlns:a14="http://schemas.microsoft.com/office/drawing/2010/main">
+              <mc:Choice Requires="a14">
+                <a14:m>
+                  <m:oMath xmlns:m="http://schemas.openxmlformats.org/officeDocument/2006/math">
+                    <m:r>
+                      <m:t>I</m:t>
+                    </m:r>
+                    <m:r>
+                      <m:t>V</m:t>
+                    </m:r>
+                  </m:oMath>
+                </a14:m>
+              </mc:Choice>
+            </mc:AlternateContent>
+            <a:r>
+              <a:rPr lang="en-US" sz="1600">
+                <a:solidFill>
+                  <a:srgbClr val="F0F0F0"/>
+                </a:solidFill>
+                <a:latin typeface="Arial"/>
+              </a:rPr>
+              <a:t> </a:t>
+            </a:r>
+            <a:r>
+              <a:rPr lang="en-US" sz="1600">
+                <a:solidFill>
+                  <a:srgbClr val="F0F0F0"/>
+                </a:solidFill>
+                <a:latin typeface="Arial"/>
+              </a:rPr>
+              <a:t>are correct</a:t>
             </a:r>
           </a:p>
         </p:txBody>
@@ -8304,7 +9495,7 @@
         </p:nvSpPr>
         <p:spPr>
           <a:xfrm>
-            <a:off x="457200" y="2376525"/>
+            <a:off x="457200" y="2681020"/>
             <a:ext cx="5477256" cy="457200"/>
           </a:xfrm>
           <a:prstGeom prst="rect">
@@ -8318,7 +9509,14 @@
           </a:bodyPr>
           <a:lstStyle/>
           <a:p>
-            <a:pPr algn="l"/>
+            <a:pPr algn="l">
+              <a:defRPr sz="1600">
+                <a:solidFill>
+                  <a:srgbClr val="F0F0F0"/>
+                </a:solidFill>
+                <a:latin typeface="Arial"/>
+              </a:defRPr>
+            </a:pPr>
             <a:r>
               <a:rPr b="1" sz="1600">
                 <a:solidFill>
@@ -8329,13 +9527,54 @@
               <a:t>C. </a:t>
             </a:r>
             <a:r>
-              <a:rPr sz="1600" b="0">
+              <a:rPr lang="en-US" sz="1600">
                 <a:solidFill>
                   <a:srgbClr val="F0F0F0"/>
                 </a:solidFill>
                 <a:latin typeface="Arial"/>
               </a:rPr>
-              <a:t>Only statements I and II are correct</a:t>
+              <a:t>Only statements I and</a:t>
+            </a:r>
+            <a:r>
+              <a:rPr lang="en-US" sz="1600">
+                <a:solidFill>
+                  <a:srgbClr val="F0F0F0"/>
+                </a:solidFill>
+                <a:latin typeface="Arial"/>
+              </a:rPr>
+              <a:t> </a:t>
+            </a:r>
+            <mc:AlternateContent xmlns:mc="http://schemas.openxmlformats.org/markup-compatibility/2006" xmlns:a14="http://schemas.microsoft.com/office/drawing/2010/main">
+              <mc:Choice Requires="a14">
+                <a14:m>
+                  <m:oMath xmlns:m="http://schemas.openxmlformats.org/officeDocument/2006/math">
+                    <m:r>
+                      <m:t>I</m:t>
+                    </m:r>
+                    <m:r>
+                      <m:t>I</m:t>
+                    </m:r>
+                  </m:oMath>
+                </a14:m>
+              </mc:Choice>
+            </mc:AlternateContent>
+            <a:r>
+              <a:rPr lang="en-US" sz="1600">
+                <a:solidFill>
+                  <a:srgbClr val="F0F0F0"/>
+                </a:solidFill>
+                <a:latin typeface="Arial"/>
+              </a:rPr>
+              <a:t> </a:t>
+            </a:r>
+            <a:r>
+              <a:rPr lang="en-US" sz="1600">
+                <a:solidFill>
+                  <a:srgbClr val="F0F0F0"/>
+                </a:solidFill>
+                <a:latin typeface="Arial"/>
+              </a:rPr>
+              <a:t>are correct</a:t>
             </a:r>
           </a:p>
         </p:txBody>
@@ -8348,7 +9587,7 @@
         </p:nvSpPr>
         <p:spPr>
           <a:xfrm>
-            <a:off x="6254496" y="2376525"/>
+            <a:off x="6254496" y="2681020"/>
             <a:ext cx="5477256" cy="457200"/>
           </a:xfrm>
           <a:prstGeom prst="rect">
@@ -8362,7 +9601,14 @@
           </a:bodyPr>
           <a:lstStyle/>
           <a:p>
-            <a:pPr algn="l"/>
+            <a:pPr algn="l">
+              <a:defRPr sz="1600">
+                <a:solidFill>
+                  <a:srgbClr val="F0F0F0"/>
+                </a:solidFill>
+                <a:latin typeface="Arial"/>
+              </a:defRPr>
+            </a:pPr>
             <a:r>
               <a:rPr b="1" sz="1600">
                 <a:solidFill>
@@ -8373,13 +9619,54 @@
               <a:t>D. </a:t>
             </a:r>
             <a:r>
-              <a:rPr sz="1600" b="0">
+              <a:rPr lang="en-US" sz="1600">
                 <a:solidFill>
                   <a:srgbClr val="F0F0F0"/>
                 </a:solidFill>
                 <a:latin typeface="Arial"/>
               </a:rPr>
-              <a:t>Only statements I and IV are correct</a:t>
+              <a:t>Only statements I and</a:t>
+            </a:r>
+            <a:r>
+              <a:rPr lang="en-US" sz="1600">
+                <a:solidFill>
+                  <a:srgbClr val="F0F0F0"/>
+                </a:solidFill>
+                <a:latin typeface="Arial"/>
+              </a:rPr>
+              <a:t> </a:t>
+            </a:r>
+            <mc:AlternateContent xmlns:mc="http://schemas.openxmlformats.org/markup-compatibility/2006" xmlns:a14="http://schemas.microsoft.com/office/drawing/2010/main">
+              <mc:Choice Requires="a14">
+                <a14:m>
+                  <m:oMath xmlns:m="http://schemas.openxmlformats.org/officeDocument/2006/math">
+                    <m:r>
+                      <m:t>I</m:t>
+                    </m:r>
+                    <m:r>
+                      <m:t>V</m:t>
+                    </m:r>
+                  </m:oMath>
+                </a14:m>
+              </mc:Choice>
+            </mc:AlternateContent>
+            <a:r>
+              <a:rPr lang="en-US" sz="1600">
+                <a:solidFill>
+                  <a:srgbClr val="F0F0F0"/>
+                </a:solidFill>
+                <a:latin typeface="Arial"/>
+              </a:rPr>
+              <a:t> </a:t>
+            </a:r>
+            <a:r>
+              <a:rPr lang="en-US" sz="1600">
+                <a:solidFill>
+                  <a:srgbClr val="F0F0F0"/>
+                </a:solidFill>
+                <a:latin typeface="Arial"/>
+              </a:rPr>
+              <a:t>are correct</a:t>
             </a:r>
           </a:p>
         </p:txBody>
@@ -8579,15 +9866,90 @@
           </a:bodyPr>
           <a:lstStyle/>
           <a:p>
-            <a:pPr algn="l"/>
-            <a:r>
-              <a:rPr sz="1800" b="1">
-                <a:solidFill>
-                  <a:srgbClr val="FAD02C"/>
-                </a:solidFill>
-                <a:latin typeface="Arial"/>
-              </a:rPr>
-              <a:t>Write any three exp erimental observations of photoelectric effect</a:t>
+            <a:pPr algn="l">
+              <a:defRPr sz="1800" b="1">
+                <a:solidFill>
+                  <a:srgbClr val="FAD02C"/>
+                </a:solidFill>
+                <a:latin typeface="Arial"/>
+              </a:defRPr>
+            </a:pPr>
+            <a:r>
+              <a:rPr lang="en-US" sz="1800" b="1">
+                <a:solidFill>
+                  <a:srgbClr val="FAD02C"/>
+                </a:solidFill>
+                <a:latin typeface="Arial"/>
+              </a:rPr>
+              <a:t>Write any three</a:t>
+            </a:r>
+            <a:r>
+              <a:rPr lang="en-US" sz="1800" b="1">
+                <a:solidFill>
+                  <a:srgbClr val="FAD02C"/>
+                </a:solidFill>
+                <a:latin typeface="Arial"/>
+              </a:rPr>
+              <a:t> </a:t>
+            </a:r>
+            <mc:AlternateContent xmlns:mc="http://schemas.openxmlformats.org/markup-compatibility/2006" xmlns:a14="http://schemas.microsoft.com/office/drawing/2010/main">
+              <mc:Choice Requires="a14">
+                <a14:m>
+                  <m:oMath xmlns:m="http://schemas.openxmlformats.org/officeDocument/2006/math">
+                    <m:r>
+                      <m:rPr>
+                        <m:sty m:val="p"/>
+                      </m:rPr>
+                      <m:t>exp</m:t>
+                    </m:r>
+                    <m:r>
+                      <m:t>e</m:t>
+                    </m:r>
+                    <m:r>
+                      <m:t>r</m:t>
+                    </m:r>
+                    <m:r>
+                      <m:t>i</m:t>
+                    </m:r>
+                    <m:r>
+                      <m:t>m</m:t>
+                    </m:r>
+                    <m:r>
+                      <m:t>e</m:t>
+                    </m:r>
+                    <m:r>
+                      <m:t>n</m:t>
+                    </m:r>
+                    <m:r>
+                      <m:t>t</m:t>
+                    </m:r>
+                    <m:r>
+                      <m:t>a</m:t>
+                    </m:r>
+                    <m:r>
+                      <m:t>l</m:t>
+                    </m:r>
+                  </m:oMath>
+                </a14:m>
+              </mc:Choice>
+            </mc:AlternateContent>
+            <a:r>
+              <a:rPr lang="en-US" sz="1800" b="1">
+                <a:solidFill>
+                  <a:srgbClr val="FAD02C"/>
+                </a:solidFill>
+                <a:latin typeface="Arial"/>
+              </a:rPr>
+              <a:t> </a:t>
+            </a:r>
+            <a:r>
+              <a:rPr lang="en-US" sz="1800" b="1">
+                <a:solidFill>
+                  <a:srgbClr val="FAD02C"/>
+                </a:solidFill>
+                <a:latin typeface="Arial"/>
+              </a:rPr>
+              <a:t>observations of photoelectric effect</a:t>
             </a:r>
           </a:p>
         </p:txBody>
@@ -8995,15 +10357,75 @@
           </a:bodyPr>
           <a:lstStyle/>
           <a:p>
-            <a:pPr algn="l"/>
-            <a:r>
-              <a:rPr sz="1800" b="1">
-                <a:solidFill>
-                  <a:srgbClr val="FAD02C"/>
-                </a:solidFill>
-                <a:latin typeface="Arial"/>
-              </a:rPr>
-              <a:t>Define work function. Write Einstein’s photoelectric equation and exp lain the terms.</a:t>
+            <a:pPr algn="l">
+              <a:defRPr sz="1800" b="1">
+                <a:solidFill>
+                  <a:srgbClr val="FAD02C"/>
+                </a:solidFill>
+                <a:latin typeface="Arial"/>
+              </a:defRPr>
+            </a:pPr>
+            <a:r>
+              <a:rPr lang="en-US" sz="1800" b="1">
+                <a:solidFill>
+                  <a:srgbClr val="FAD02C"/>
+                </a:solidFill>
+                <a:latin typeface="Arial"/>
+              </a:rPr>
+              <a:t>Define work function. Write Einstein’s photoelectric equation and</a:t>
+            </a:r>
+            <a:r>
+              <a:rPr lang="en-US" sz="1800" b="1">
+                <a:solidFill>
+                  <a:srgbClr val="FAD02C"/>
+                </a:solidFill>
+                <a:latin typeface="Arial"/>
+              </a:rPr>
+              <a:t> </a:t>
+            </a:r>
+            <mc:AlternateContent xmlns:mc="http://schemas.openxmlformats.org/markup-compatibility/2006" xmlns:a14="http://schemas.microsoft.com/office/drawing/2010/main">
+              <mc:Choice Requires="a14">
+                <a14:m>
+                  <m:oMath xmlns:m="http://schemas.openxmlformats.org/officeDocument/2006/math">
+                    <m:r>
+                      <m:rPr>
+                        <m:sty m:val="p"/>
+                      </m:rPr>
+                      <m:t>exp</m:t>
+                    </m:r>
+                    <m:r>
+                      <m:t>l</m:t>
+                    </m:r>
+                    <m:r>
+                      <m:t>a</m:t>
+                    </m:r>
+                    <m:r>
+                      <m:t>i</m:t>
+                    </m:r>
+                    <m:r>
+                      <m:t>n</m:t>
+                    </m:r>
+                  </m:oMath>
+                </a14:m>
+              </mc:Choice>
+            </mc:AlternateContent>
+            <a:r>
+              <a:rPr lang="en-US" sz="1800" b="1">
+                <a:solidFill>
+                  <a:srgbClr val="FAD02C"/>
+                </a:solidFill>
+                <a:latin typeface="Arial"/>
+              </a:rPr>
+              <a:t> </a:t>
+            </a:r>
+            <a:r>
+              <a:rPr lang="en-US" sz="1800" b="1">
+                <a:solidFill>
+                  <a:srgbClr val="FAD02C"/>
+                </a:solidFill>
+                <a:latin typeface="Arial"/>
+              </a:rPr>
+              <a:t>the terms.</a:t>
             </a:r>
           </a:p>
         </p:txBody>
@@ -9203,15 +10625,84 @@
           </a:bodyPr>
           <a:lstStyle/>
           <a:p>
-            <a:pPr algn="l"/>
-            <a:r>
-              <a:rPr sz="1800" b="1">
-                <a:solidFill>
-                  <a:srgbClr val="FAD02C"/>
-                </a:solidFill>
-                <a:latin typeface="Arial"/>
-              </a:rPr>
-              <a:t>Deduce an exp ression for total energy of electron in an orbit of hydrogen atom in terms of radius of orbit.</a:t>
+            <a:pPr algn="l">
+              <a:defRPr sz="1800" b="1">
+                <a:solidFill>
+                  <a:srgbClr val="FAD02C"/>
+                </a:solidFill>
+                <a:latin typeface="Arial"/>
+              </a:defRPr>
+            </a:pPr>
+            <a:r>
+              <a:rPr lang="en-US" sz="1800" b="1">
+                <a:solidFill>
+                  <a:srgbClr val="FAD02C"/>
+                </a:solidFill>
+                <a:latin typeface="Arial"/>
+              </a:rPr>
+              <a:t>Deduce an</a:t>
+            </a:r>
+            <a:r>
+              <a:rPr lang="en-US" sz="1800" b="1">
+                <a:solidFill>
+                  <a:srgbClr val="FAD02C"/>
+                </a:solidFill>
+                <a:latin typeface="Arial"/>
+              </a:rPr>
+              <a:t> </a:t>
+            </a:r>
+            <mc:AlternateContent xmlns:mc="http://schemas.openxmlformats.org/markup-compatibility/2006" xmlns:a14="http://schemas.microsoft.com/office/drawing/2010/main">
+              <mc:Choice Requires="a14">
+                <a14:m>
+                  <m:oMath xmlns:m="http://schemas.openxmlformats.org/officeDocument/2006/math">
+                    <m:r>
+                      <m:rPr>
+                        <m:sty m:val="p"/>
+                      </m:rPr>
+                      <m:t>exp</m:t>
+                    </m:r>
+                    <m:r>
+                      <m:t>r</m:t>
+                    </m:r>
+                    <m:r>
+                      <m:t>e</m:t>
+                    </m:r>
+                    <m:r>
+                      <m:t>s</m:t>
+                    </m:r>
+                    <m:r>
+                      <m:t>s</m:t>
+                    </m:r>
+                    <m:r>
+                      <m:t>i</m:t>
+                    </m:r>
+                    <m:r>
+                      <m:t>o</m:t>
+                    </m:r>
+                    <m:r>
+                      <m:t>n</m:t>
+                    </m:r>
+                  </m:oMath>
+                </a14:m>
+              </mc:Choice>
+            </mc:AlternateContent>
+            <a:r>
+              <a:rPr lang="en-US" sz="1800" b="1">
+                <a:solidFill>
+                  <a:srgbClr val="FAD02C"/>
+                </a:solidFill>
+                <a:latin typeface="Arial"/>
+              </a:rPr>
+              <a:t> </a:t>
+            </a:r>
+            <a:r>
+              <a:rPr lang="en-US" sz="1800" b="1">
+                <a:solidFill>
+                  <a:srgbClr val="FAD02C"/>
+                </a:solidFill>
+                <a:latin typeface="Arial"/>
+              </a:rPr>
+              <a:t>for total energy of electron in an orbit of hydrogen atom in terms of radius of orbit.</a:t>
             </a:r>
           </a:p>
         </p:txBody>
@@ -9411,15 +10902,87 @@
           </a:bodyPr>
           <a:lstStyle/>
           <a:p>
-            <a:pPr algn="l"/>
-            <a:r>
-              <a:rPr sz="1800" b="1">
-                <a:solidFill>
-                  <a:srgbClr val="FAD02C"/>
-                </a:solidFill>
-                <a:latin typeface="Arial"/>
-              </a:rPr>
-              <a:t>Write Einstein’s equation of photoelectric effect. Give Einstein’s exp lanation of photoelectric effect.</a:t>
+            <a:pPr algn="l">
+              <a:defRPr sz="1800" b="1">
+                <a:solidFill>
+                  <a:srgbClr val="FAD02C"/>
+                </a:solidFill>
+                <a:latin typeface="Arial"/>
+              </a:defRPr>
+            </a:pPr>
+            <a:r>
+              <a:rPr lang="en-US" sz="1800" b="1">
+                <a:solidFill>
+                  <a:srgbClr val="FAD02C"/>
+                </a:solidFill>
+                <a:latin typeface="Arial"/>
+              </a:rPr>
+              <a:t>Write Einstein’s equation of photoelectric effect. Give Einstein’s</a:t>
+            </a:r>
+            <a:r>
+              <a:rPr lang="en-US" sz="1800" b="1">
+                <a:solidFill>
+                  <a:srgbClr val="FAD02C"/>
+                </a:solidFill>
+                <a:latin typeface="Arial"/>
+              </a:rPr>
+              <a:t> </a:t>
+            </a:r>
+            <mc:AlternateContent xmlns:mc="http://schemas.openxmlformats.org/markup-compatibility/2006" xmlns:a14="http://schemas.microsoft.com/office/drawing/2010/main">
+              <mc:Choice Requires="a14">
+                <a14:m>
+                  <m:oMath xmlns:m="http://schemas.openxmlformats.org/officeDocument/2006/math">
+                    <m:r>
+                      <m:rPr>
+                        <m:sty m:val="p"/>
+                      </m:rPr>
+                      <m:t>exp</m:t>
+                    </m:r>
+                    <m:r>
+                      <m:t>l</m:t>
+                    </m:r>
+                    <m:r>
+                      <m:t>a</m:t>
+                    </m:r>
+                    <m:r>
+                      <m:t>n</m:t>
+                    </m:r>
+                    <m:r>
+                      <m:t>a</m:t>
+                    </m:r>
+                    <m:r>
+                      <m:t>t</m:t>
+                    </m:r>
+                    <m:r>
+                      <m:t>i</m:t>
+                    </m:r>
+                    <m:r>
+                      <m:t>o</m:t>
+                    </m:r>
+                    <m:r>
+                      <m:t>n</m:t>
+                    </m:r>
+                  </m:oMath>
+                </a14:m>
+              </mc:Choice>
+            </mc:AlternateContent>
+            <a:r>
+              <a:rPr lang="en-US" sz="1800" b="1">
+                <a:solidFill>
+                  <a:srgbClr val="FAD02C"/>
+                </a:solidFill>
+                <a:latin typeface="Arial"/>
+              </a:rPr>
+              <a:t> </a:t>
+            </a:r>
+            <a:r>
+              <a:rPr lang="en-US" sz="1800" b="1">
+                <a:solidFill>
+                  <a:srgbClr val="FAD02C"/>
+                </a:solidFill>
+                <a:latin typeface="Arial"/>
+              </a:rPr>
+              <a:t>of photoelectric effect.</a:t>
             </a:r>
           </a:p>
         </p:txBody>
@@ -9712,7 +11275,10 @@
                 </a:solidFill>
                 <a:latin typeface="Arial"/>
               </a:rPr>
-              <a:t>Define: Work function Threshold frequency Stopping potential.</a:t>
+              <a:t>Define:
+Work function
+Threshold frequency
+Stopping potential.</a:t>
             </a:r>
           </a:p>
         </p:txBody>
@@ -9912,15 +11478,90 @@
           </a:bodyPr>
           <a:lstStyle/>
           <a:p>
-            <a:pPr algn="l"/>
-            <a:r>
-              <a:rPr sz="1800" b="1">
-                <a:solidFill>
-                  <a:srgbClr val="FAD02C"/>
-                </a:solidFill>
-                <a:latin typeface="Arial"/>
-              </a:rPr>
-              <a:t>Write the exp erimental observations of photo electric effect.</a:t>
+            <a:pPr algn="l">
+              <a:defRPr sz="1800" b="1">
+                <a:solidFill>
+                  <a:srgbClr val="FAD02C"/>
+                </a:solidFill>
+                <a:latin typeface="Arial"/>
+              </a:defRPr>
+            </a:pPr>
+            <a:r>
+              <a:rPr lang="en-US" sz="1800" b="1">
+                <a:solidFill>
+                  <a:srgbClr val="FAD02C"/>
+                </a:solidFill>
+                <a:latin typeface="Arial"/>
+              </a:rPr>
+              <a:t>Write the</a:t>
+            </a:r>
+            <a:r>
+              <a:rPr lang="en-US" sz="1800" b="1">
+                <a:solidFill>
+                  <a:srgbClr val="FAD02C"/>
+                </a:solidFill>
+                <a:latin typeface="Arial"/>
+              </a:rPr>
+              <a:t> </a:t>
+            </a:r>
+            <mc:AlternateContent xmlns:mc="http://schemas.openxmlformats.org/markup-compatibility/2006" xmlns:a14="http://schemas.microsoft.com/office/drawing/2010/main">
+              <mc:Choice Requires="a14">
+                <a14:m>
+                  <m:oMath xmlns:m="http://schemas.openxmlformats.org/officeDocument/2006/math">
+                    <m:r>
+                      <m:rPr>
+                        <m:sty m:val="p"/>
+                      </m:rPr>
+                      <m:t>exp</m:t>
+                    </m:r>
+                    <m:r>
+                      <m:t>e</m:t>
+                    </m:r>
+                    <m:r>
+                      <m:t>r</m:t>
+                    </m:r>
+                    <m:r>
+                      <m:t>i</m:t>
+                    </m:r>
+                    <m:r>
+                      <m:t>m</m:t>
+                    </m:r>
+                    <m:r>
+                      <m:t>e</m:t>
+                    </m:r>
+                    <m:r>
+                      <m:t>n</m:t>
+                    </m:r>
+                    <m:r>
+                      <m:t>t</m:t>
+                    </m:r>
+                    <m:r>
+                      <m:t>a</m:t>
+                    </m:r>
+                    <m:r>
+                      <m:t>l</m:t>
+                    </m:r>
+                  </m:oMath>
+                </a14:m>
+              </mc:Choice>
+            </mc:AlternateContent>
+            <a:r>
+              <a:rPr lang="en-US" sz="1800" b="1">
+                <a:solidFill>
+                  <a:srgbClr val="FAD02C"/>
+                </a:solidFill>
+                <a:latin typeface="Arial"/>
+              </a:rPr>
+              <a:t> </a:t>
+            </a:r>
+            <a:r>
+              <a:rPr lang="en-US" sz="1800" b="1">
+                <a:solidFill>
+                  <a:srgbClr val="FAD02C"/>
+                </a:solidFill>
+                <a:latin typeface="Arial"/>
+              </a:rPr>
+              <a:t>observations of photo electric effect.</a:t>
             </a:r>
           </a:p>
         </p:txBody>
@@ -10120,15 +11761,90 @@
           </a:bodyPr>
           <a:lstStyle/>
           <a:p>
-            <a:pPr algn="l"/>
-            <a:r>
-              <a:rPr sz="1800" b="1">
-                <a:solidFill>
-                  <a:srgbClr val="FAD02C"/>
-                </a:solidFill>
-                <a:latin typeface="Arial"/>
-              </a:rPr>
-              <a:t>What is photoelectric effect? Write exp erimental observations of photoelectric effect</a:t>
+            <a:pPr algn="l">
+              <a:defRPr sz="1800" b="1">
+                <a:solidFill>
+                  <a:srgbClr val="FAD02C"/>
+                </a:solidFill>
+                <a:latin typeface="Arial"/>
+              </a:defRPr>
+            </a:pPr>
+            <a:r>
+              <a:rPr lang="en-US" sz="1800" b="1">
+                <a:solidFill>
+                  <a:srgbClr val="FAD02C"/>
+                </a:solidFill>
+                <a:latin typeface="Arial"/>
+              </a:rPr>
+              <a:t>What is photoelectric effect? Write</a:t>
+            </a:r>
+            <a:r>
+              <a:rPr lang="en-US" sz="1800" b="1">
+                <a:solidFill>
+                  <a:srgbClr val="FAD02C"/>
+                </a:solidFill>
+                <a:latin typeface="Arial"/>
+              </a:rPr>
+              <a:t> </a:t>
+            </a:r>
+            <mc:AlternateContent xmlns:mc="http://schemas.openxmlformats.org/markup-compatibility/2006" xmlns:a14="http://schemas.microsoft.com/office/drawing/2010/main">
+              <mc:Choice Requires="a14">
+                <a14:m>
+                  <m:oMath xmlns:m="http://schemas.openxmlformats.org/officeDocument/2006/math">
+                    <m:r>
+                      <m:rPr>
+                        <m:sty m:val="p"/>
+                      </m:rPr>
+                      <m:t>exp</m:t>
+                    </m:r>
+                    <m:r>
+                      <m:t>e</m:t>
+                    </m:r>
+                    <m:r>
+                      <m:t>r</m:t>
+                    </m:r>
+                    <m:r>
+                      <m:t>i</m:t>
+                    </m:r>
+                    <m:r>
+                      <m:t>m</m:t>
+                    </m:r>
+                    <m:r>
+                      <m:t>e</m:t>
+                    </m:r>
+                    <m:r>
+                      <m:t>n</m:t>
+                    </m:r>
+                    <m:r>
+                      <m:t>t</m:t>
+                    </m:r>
+                    <m:r>
+                      <m:t>a</m:t>
+                    </m:r>
+                    <m:r>
+                      <m:t>l</m:t>
+                    </m:r>
+                  </m:oMath>
+                </a14:m>
+              </mc:Choice>
+            </mc:AlternateContent>
+            <a:r>
+              <a:rPr lang="en-US" sz="1800" b="1">
+                <a:solidFill>
+                  <a:srgbClr val="FAD02C"/>
+                </a:solidFill>
+                <a:latin typeface="Arial"/>
+              </a:rPr>
+              <a:t> </a:t>
+            </a:r>
+            <a:r>
+              <a:rPr lang="en-US" sz="1800" b="1">
+                <a:solidFill>
+                  <a:srgbClr val="FAD02C"/>
+                </a:solidFill>
+                <a:latin typeface="Arial"/>
+              </a:rPr>
+              <a:t>observations of photoelectric effect</a:t>
             </a:r>
           </a:p>
         </p:txBody>
@@ -10168,7 +11884,7 @@
         <p:spPr>
           <a:xfrm>
             <a:off x="457200" y="182880"/>
-            <a:ext cx="758952" cy="402336"/>
+            <a:ext cx="1417320" cy="402336"/>
           </a:xfrm>
           <a:prstGeom prst="roundRect">
             <a:avLst/>
@@ -10256,7 +11972,7 @@
         <p:spPr>
           <a:xfrm>
             <a:off x="594360" y="182880"/>
-            <a:ext cx="594359" cy="402336"/>
+            <a:ext cx="1252728" cy="402336"/>
           </a:xfrm>
           <a:prstGeom prst="rect">
             <a:avLst/>
@@ -10277,7 +11993,7 @@
                 </a:solidFill>
                 <a:latin typeface="Arial"/>
               </a:rPr>
-              <a:t>2023</a:t>
+              <a:t>2023,2024-2</a:t>
             </a:r>
           </a:p>
         </p:txBody>
@@ -10328,15 +12044,235 @@
           </a:bodyPr>
           <a:lstStyle/>
           <a:p>
-            <a:pPr algn="l"/>
-            <a:r>
-              <a:rPr sz="1800" b="1">
-                <a:solidFill>
-                  <a:srgbClr val="FAD02C"/>
-                </a:solidFill>
-                <a:latin typeface="Arial"/>
-              </a:rPr>
-              <a:t>(i) Give Einstein’s exp lanation of photoelectric effect.</a:t>
+            <a:pPr algn="l">
+              <a:defRPr sz="1800" b="1">
+                <a:solidFill>
+                  <a:srgbClr val="FAD02C"/>
+                </a:solidFill>
+                <a:latin typeface="Arial"/>
+              </a:defRPr>
+            </a:pPr>
+            <a:r>
+              <a:rPr lang="en-US" sz="1800" b="1">
+                <a:solidFill>
+                  <a:srgbClr val="FAD02C"/>
+                </a:solidFill>
+                <a:latin typeface="Arial"/>
+              </a:rPr>
+              <a:t>Give Einstein’s</a:t>
+            </a:r>
+            <a:r>
+              <a:rPr lang="en-US" sz="1800" b="1">
+                <a:solidFill>
+                  <a:srgbClr val="FAD02C"/>
+                </a:solidFill>
+                <a:latin typeface="Arial"/>
+              </a:rPr>
+              <a:t> </a:t>
+            </a:r>
+            <mc:AlternateContent xmlns:mc="http://schemas.openxmlformats.org/markup-compatibility/2006" xmlns:a14="http://schemas.microsoft.com/office/drawing/2010/main">
+              <mc:Choice Requires="a14">
+                <a14:m>
+                  <m:oMath xmlns:m="http://schemas.openxmlformats.org/officeDocument/2006/math">
+                    <m:r>
+                      <m:rPr>
+                        <m:sty m:val="p"/>
+                      </m:rPr>
+                      <m:t>exp</m:t>
+                    </m:r>
+                    <m:r>
+                      <m:t>l</m:t>
+                    </m:r>
+                    <m:r>
+                      <m:t>a</m:t>
+                    </m:r>
+                    <m:r>
+                      <m:t>n</m:t>
+                    </m:r>
+                    <m:r>
+                      <m:t>a</m:t>
+                    </m:r>
+                    <m:r>
+                      <m:t>t</m:t>
+                    </m:r>
+                    <m:r>
+                      <m:t>i</m:t>
+                    </m:r>
+                    <m:r>
+                      <m:t>o</m:t>
+                    </m:r>
+                    <m:r>
+                      <m:t>n</m:t>
+                    </m:r>
+                  </m:oMath>
+                </a14:m>
+              </mc:Choice>
+            </mc:AlternateContent>
+            <a:r>
+              <a:rPr lang="en-US" sz="1800" b="1">
+                <a:solidFill>
+                  <a:srgbClr val="FAD02C"/>
+                </a:solidFill>
+                <a:latin typeface="Arial"/>
+              </a:rPr>
+              <a:t> </a:t>
+            </a:r>
+            <a:r>
+              <a:rPr lang="en-US" sz="1800" b="1">
+                <a:solidFill>
+                  <a:srgbClr val="FAD02C"/>
+                </a:solidFill>
+                <a:latin typeface="Arial"/>
+              </a:rPr>
+              <a:t>of photoelectric effect. (2023)</a:t>
+            </a:r>
+            <a:r>
+              <a:rPr lang="en-US" sz="1800" b="1">
+                <a:solidFill>
+                  <a:srgbClr val="FAD02C"/>
+                </a:solidFill>
+                <a:latin typeface="Arial"/>
+              </a:rPr>
+              <a:t>Mention any two properties of photons.</a:t>
+            </a:r>
+            <a:r>
+              <a:rPr lang="en-US" sz="1800" b="1">
+                <a:solidFill>
+                  <a:srgbClr val="FAD02C"/>
+                </a:solidFill>
+                <a:latin typeface="Arial"/>
+              </a:rPr>
+              <a:t>What is meant by photoelectric effect? (b) Mention any two</a:t>
+            </a:r>
+            <a:r>
+              <a:rPr lang="en-US" sz="1800" b="1">
+                <a:solidFill>
+                  <a:srgbClr val="FAD02C"/>
+                </a:solidFill>
+                <a:latin typeface="Arial"/>
+              </a:rPr>
+              <a:t> </a:t>
+            </a:r>
+            <mc:AlternateContent xmlns:mc="http://schemas.openxmlformats.org/markup-compatibility/2006" xmlns:a14="http://schemas.microsoft.com/office/drawing/2010/main">
+              <mc:Choice Requires="a14">
+                <a14:m>
+                  <m:oMath xmlns:m="http://schemas.openxmlformats.org/officeDocument/2006/math">
+                    <m:r>
+                      <m:rPr>
+                        <m:sty m:val="p"/>
+                      </m:rPr>
+                      <m:t>exp</m:t>
+                    </m:r>
+                    <m:r>
+                      <m:t>e</m:t>
+                    </m:r>
+                    <m:r>
+                      <m:t>r</m:t>
+                    </m:r>
+                    <m:r>
+                      <m:t>i</m:t>
+                    </m:r>
+                    <m:r>
+                      <m:t>m</m:t>
+                    </m:r>
+                    <m:r>
+                      <m:t>e</m:t>
+                    </m:r>
+                    <m:r>
+                      <m:t>n</m:t>
+                    </m:r>
+                    <m:r>
+                      <m:t>t</m:t>
+                    </m:r>
+                    <m:r>
+                      <m:t>a</m:t>
+                    </m:r>
+                    <m:r>
+                      <m:t>l</m:t>
+                    </m:r>
+                  </m:oMath>
+                </a14:m>
+              </mc:Choice>
+            </mc:AlternateContent>
+            <a:r>
+              <a:rPr lang="en-US" sz="1800" b="1">
+                <a:solidFill>
+                  <a:srgbClr val="FAD02C"/>
+                </a:solidFill>
+                <a:latin typeface="Arial"/>
+              </a:rPr>
+              <a:t> </a:t>
+            </a:r>
+            <a:r>
+              <a:rPr lang="en-US" sz="1800" b="1">
+                <a:solidFill>
+                  <a:srgbClr val="FAD02C"/>
+                </a:solidFill>
+                <a:latin typeface="Arial"/>
+              </a:rPr>
+              <a:t>observations of photoelectric effect.</a:t>
+            </a:r>
+            <a:r>
+              <a:rPr lang="en-US" sz="1800" b="1">
+                <a:solidFill>
+                  <a:srgbClr val="FAD02C"/>
+                </a:solidFill>
+                <a:latin typeface="Arial"/>
+              </a:rPr>
+              <a:t>Write Einstein’s photoelectric equation and</a:t>
+            </a:r>
+            <a:r>
+              <a:rPr lang="en-US" sz="1800" b="1">
+                <a:solidFill>
+                  <a:srgbClr val="FAD02C"/>
+                </a:solidFill>
+                <a:latin typeface="Arial"/>
+              </a:rPr>
+              <a:t> </a:t>
+            </a:r>
+            <mc:AlternateContent xmlns:mc="http://schemas.openxmlformats.org/markup-compatibility/2006" xmlns:a14="http://schemas.microsoft.com/office/drawing/2010/main">
+              <mc:Choice Requires="a14">
+                <a14:m>
+                  <m:oMath xmlns:m="http://schemas.openxmlformats.org/officeDocument/2006/math">
+                    <m:r>
+                      <m:rPr>
+                        <m:sty m:val="p"/>
+                      </m:rPr>
+                      <m:t>exp</m:t>
+                    </m:r>
+                    <m:r>
+                      <m:t>l</m:t>
+                    </m:r>
+                    <m:r>
+                      <m:t>a</m:t>
+                    </m:r>
+                    <m:r>
+                      <m:t>i</m:t>
+                    </m:r>
+                    <m:r>
+                      <m:t>n</m:t>
+                    </m:r>
+                  </m:oMath>
+                </a14:m>
+              </mc:Choice>
+            </mc:AlternateContent>
+            <a:r>
+              <a:rPr lang="en-US" sz="1800" b="1">
+                <a:solidFill>
+                  <a:srgbClr val="FAD02C"/>
+                </a:solidFill>
+                <a:latin typeface="Arial"/>
+              </a:rPr>
+              <a:t> </a:t>
+            </a:r>
+            <a:r>
+              <a:rPr lang="en-US" sz="1800" b="1">
+                <a:solidFill>
+                  <a:srgbClr val="FAD02C"/>
+                </a:solidFill>
+                <a:latin typeface="Arial"/>
+              </a:rPr>
+              <a:t>the terms.</a:t>
             </a:r>
           </a:p>
         </p:txBody>
@@ -10751,9 +12687,132 @@
         <p:nvPr/>
       </p:nvGrpSpPr>
       <p:grpSpPr/>
+      <p:sp>
+        <p:nvSpPr>
+          <p:cNvPr id="2" name="Rounded Rectangle 1"/>
+          <p:cNvSpPr/>
+          <p:nvPr/>
+        </p:nvSpPr>
+        <p:spPr>
+          <a:xfrm>
+            <a:off x="457200" y="182880"/>
+            <a:ext cx="1316736" cy="402336"/>
+          </a:xfrm>
+          <a:prstGeom prst="roundRect">
+            <a:avLst/>
+          </a:prstGeom>
+          <a:solidFill>
+            <a:srgbClr val="1A1608"/>
+          </a:solidFill>
+          <a:ln w="9525">
+            <a:solidFill>
+              <a:srgbClr val="FAD02C"/>
+            </a:solidFill>
+          </a:ln>
+        </p:spPr>
+        <p:style>
+          <a:lnRef idx="1">
+            <a:schemeClr val="accent1"/>
+          </a:lnRef>
+          <a:fillRef idx="3">
+            <a:schemeClr val="accent1"/>
+          </a:fillRef>
+          <a:effectRef idx="2">
+            <a:schemeClr val="accent1"/>
+          </a:effectRef>
+          <a:fontRef idx="minor">
+            <a:schemeClr val="lt1"/>
+          </a:fontRef>
+        </p:style>
+        <p:txBody>
+          <a:bodyPr rtlCol="0" anchor="ctr"/>
+          <a:lstStyle/>
+          <a:p>
+            <a:pPr algn="ctr"/>
+          </a:p>
+        </p:txBody>
+      </p:sp>
+      <p:sp>
+        <p:nvSpPr>
+          <p:cNvPr id="3" name="Rectangle 2"/>
+          <p:cNvSpPr/>
+          <p:nvPr/>
+        </p:nvSpPr>
+        <p:spPr>
+          <a:xfrm>
+            <a:off x="484632" y="228600"/>
+            <a:ext cx="54864" cy="310896"/>
+          </a:xfrm>
+          <a:prstGeom prst="rect">
+            <a:avLst/>
+          </a:prstGeom>
+          <a:solidFill>
+            <a:srgbClr val="FAD02C"/>
+          </a:solidFill>
+          <a:ln>
+            <a:noFill/>
+          </a:ln>
+        </p:spPr>
+        <p:style>
+          <a:lnRef idx="1">
+            <a:schemeClr val="accent1"/>
+          </a:lnRef>
+          <a:fillRef idx="3">
+            <a:schemeClr val="accent1"/>
+          </a:fillRef>
+          <a:effectRef idx="2">
+            <a:schemeClr val="accent1"/>
+          </a:effectRef>
+          <a:fontRef idx="minor">
+            <a:schemeClr val="lt1"/>
+          </a:fontRef>
+        </p:style>
+        <p:txBody>
+          <a:bodyPr rtlCol="0" anchor="ctr"/>
+          <a:lstStyle/>
+          <a:p>
+            <a:pPr algn="ctr"/>
+          </a:p>
+        </p:txBody>
+      </p:sp>
+      <p:sp>
+        <p:nvSpPr>
+          <p:cNvPr id="4" name="TextBox 3"/>
+          <p:cNvSpPr txBox="1"/>
+          <p:nvPr/>
+        </p:nvSpPr>
+        <p:spPr>
+          <a:xfrm>
+            <a:off x="594360" y="182880"/>
+            <a:ext cx="1152144" cy="402336"/>
+          </a:xfrm>
+          <a:prstGeom prst="rect">
+            <a:avLst/>
+          </a:prstGeom>
+          <a:noFill/>
+        </p:spPr>
+        <p:txBody>
+          <a:bodyPr wrap="none" anchor="ctr" lIns="0" rIns="0" tIns="0" bIns="0">
+            <a:spAutoFit/>
+          </a:bodyPr>
+          <a:lstStyle/>
+          <a:p>
+            <a:pPr algn="l"/>
+            <a:r>
+              <a:rPr sz="1500" b="1">
+                <a:solidFill>
+                  <a:srgbClr val="FAD02C"/>
+                </a:solidFill>
+                <a:latin typeface="Arial"/>
+              </a:rPr>
+              <a:t>2014S,2025</a:t>
+            </a:r>
+          </a:p>
+        </p:txBody>
+      </p:sp>
       <p:pic>
         <p:nvPicPr>
-          <p:cNvPr id="2" name="Picture 1" descr="simplified_Logo.png"/>
+          <p:cNvPr id="5" name="Picture 4" descr="simplified_Logo.png"/>
           <p:cNvPicPr>
             <a:picLocks noChangeAspect="1"/>
           </p:cNvPicPr>
@@ -10777,7 +12836,7 @@
       </p:pic>
       <p:sp>
         <p:nvSpPr>
-          <p:cNvPr id="3" name="TextBox 2"/>
+          <p:cNvPr id="6" name="TextBox 5"/>
           <p:cNvSpPr txBox="1"/>
           <p:nvPr/>
         </p:nvSpPr>
@@ -10797,16 +12856,147 @@
           </a:bodyPr>
           <a:lstStyle/>
           <a:p>
-            <a:pPr algn="l"/>
-            <a:r>
-              <a:rPr sz="1800" b="1">
-                <a:solidFill>
-                  <a:srgbClr val="FAD02C"/>
-                </a:solidFill>
-                <a:latin typeface="Arial"/>
-              </a:rPr>
-              <a:t>(ii) Mention any two properties of photons.</a:t>
-            </a:r>
+            <a:pPr algn="l">
+              <a:defRPr sz="1800" b="1">
+                <a:solidFill>
+                  <a:srgbClr val="FAD02C"/>
+                </a:solidFill>
+                <a:latin typeface="Arial"/>
+              </a:defRPr>
+            </a:pPr>
+            <a:r>
+              <a:rPr lang="en-US" sz="1800" b="1">
+                <a:solidFill>
+                  <a:srgbClr val="FAD02C"/>
+                </a:solidFill>
+                <a:latin typeface="Arial"/>
+              </a:rPr>
+              <a:t>The work function of cesium metal is 2.14 ev. When light of frequency 6 × 1014 Hz is incident on the metal surface, photoemission of electrons occurs. Find</a:t>
+            </a:r>
+            <a:r>
+              <a:rPr lang="en-US" sz="1800" b="1">
+                <a:solidFill>
+                  <a:srgbClr val="FAD02C"/>
+                </a:solidFill>
+                <a:latin typeface="Arial"/>
+              </a:rPr>
+              <a:t> </a:t>
+            </a:r>
+            <a:r>
+              <a:rPr lang="en-US" sz="1800" b="1">
+                <a:solidFill>
+                  <a:srgbClr val="FAD02C"/>
+                </a:solidFill>
+                <a:latin typeface="Arial"/>
+              </a:rPr>
+              <a:t>Energy of incident photons</a:t>
+            </a:r>
+            <a:r>
+              <a:rPr lang="en-US" sz="1800" b="1">
+                <a:solidFill>
+                  <a:srgbClr val="FAD02C"/>
+                </a:solidFill>
+                <a:latin typeface="Arial"/>
+              </a:rPr>
+              <a:t> </a:t>
+            </a:r>
+            <a:r>
+              <a:rPr lang="en-US" sz="1800" b="1">
+                <a:solidFill>
+                  <a:srgbClr val="FAD02C"/>
+                </a:solidFill>
+                <a:latin typeface="Arial"/>
+              </a:rPr>
+              <a:t>Maximum kinetic energy of photoelectrons.</a:t>
+            </a:r>
+            <a:r>
+              <a:rPr lang="en-US" sz="1800" b="1">
+                <a:solidFill>
+                  <a:srgbClr val="FAD02C"/>
+                </a:solidFill>
+                <a:latin typeface="Arial"/>
+              </a:rPr>
+              <a:t> </a:t>
+            </a:r>
+            <a:r>
+              <a:rPr lang="en-US" sz="1800" b="1">
+                <a:solidFill>
+                  <a:srgbClr val="FAD02C"/>
+                </a:solidFill>
+                <a:latin typeface="Arial"/>
+              </a:rPr>
+              <a:t>Given, Planck’s constant h = 6.63 ×</a:t>
+            </a:r>
+            <mc:AlternateContent xmlns:mc="http://schemas.openxmlformats.org/markup-compatibility/2006" xmlns:a14="http://schemas.microsoft.com/office/drawing/2010/main">
+              <mc:Choice Requires="a14">
+                <a14:m>
+                  <m:oMath xmlns:m="http://schemas.openxmlformats.org/officeDocument/2006/math">
+                    <m:sSup>
+                      <m:e>
+                        <m:r>
+                          <m:t>10</m:t>
+                        </m:r>
+                      </m:e>
+                      <m:sup>
+                        <m:r>
+                          <m:rPr>
+                            <m:sty m:val="p"/>
+                          </m:rPr>
+                          <m:t>−</m:t>
+                        </m:r>
+                        <m:r>
+                          <m:t>34</m:t>
+                        </m:r>
+                      </m:sup>
+                    </m:sSup>
+                  </m:oMath>
+                </a14:m>
+              </mc:Choice>
+            </mc:AlternateContent>
+            <a:r>
+              <a:rPr lang="en-US" sz="1800" b="1">
+                <a:solidFill>
+                  <a:srgbClr val="FAD02C"/>
+                </a:solidFill>
+                <a:latin typeface="Arial"/>
+              </a:rPr>
+              <a:t> </a:t>
+            </a:r>
+            <a:r>
+              <a:rPr lang="en-US" sz="1800" b="1">
+                <a:solidFill>
+                  <a:srgbClr val="FAD02C"/>
+                </a:solidFill>
+                <a:latin typeface="Arial"/>
+              </a:rPr>
+              <a:t>Js, 1 ev = 1.6 ×</a:t>
+            </a:r>
+            <mc:AlternateContent xmlns:mc="http://schemas.openxmlformats.org/markup-compatibility/2006" xmlns:a14="http://schemas.microsoft.com/office/drawing/2010/main">
+              <mc:Choice Requires="a14">
+                <a14:m>
+                  <m:oMath xmlns:m="http://schemas.openxmlformats.org/officeDocument/2006/math">
+                    <m:sSup>
+                      <m:e>
+                        <m:r>
+                          <m:t>10</m:t>
+                        </m:r>
+                      </m:e>
+                      <m:sup>
+                        <m:r>
+                          <m:rPr>
+                            <m:sty m:val="p"/>
+                          </m:rPr>
+                          <m:t>−</m:t>
+                        </m:r>
+                        <m:r>
+                          <m:t>19</m:t>
+                        </m:r>
+                      </m:sup>
+                    </m:sSup>
+                  </m:oMath>
+                </a14:m>
+              </mc:Choice>
+            </mc:AlternateContent>
           </a:p>
         </p:txBody>
       </p:sp>
@@ -10845,7 +13035,7 @@
         <p:spPr>
           <a:xfrm>
             <a:off x="457200" y="182880"/>
-            <a:ext cx="1417320" cy="402336"/>
+            <a:ext cx="722376" cy="402336"/>
           </a:xfrm>
           <a:prstGeom prst="roundRect">
             <a:avLst/>
@@ -10933,7 +13123,7 @@
         <p:spPr>
           <a:xfrm>
             <a:off x="594360" y="182880"/>
-            <a:ext cx="1252728" cy="402336"/>
+            <a:ext cx="557784" cy="402336"/>
           </a:xfrm>
           <a:prstGeom prst="rect">
             <a:avLst/>
@@ -10954,7 +13144,7 @@
                 </a:solidFill>
                 <a:latin typeface="Arial"/>
               </a:rPr>
-              <a:t>2023,2024-2</a:t>
+              <a:t>2018</a:t>
             </a:r>
           </a:p>
         </p:txBody>
@@ -11005,15 +13195,166 @@
           </a:bodyPr>
           <a:lstStyle/>
           <a:p>
-            <a:pPr algn="l"/>
-            <a:r>
-              <a:rPr sz="1800" b="1">
-                <a:solidFill>
-                  <a:srgbClr val="FAD02C"/>
-                </a:solidFill>
-                <a:latin typeface="Arial"/>
-              </a:rPr>
-              <a:t>a) What is meant by photoelectric effect? (b) Mention any two exp erimental observations of photoelectric effect. (c) Write Einstein’s photoelectric equation and exp lain the terms.</a:t>
+            <a:pPr algn="l">
+              <a:defRPr sz="1800" b="1">
+                <a:solidFill>
+                  <a:srgbClr val="FAD02C"/>
+                </a:solidFill>
+                <a:latin typeface="Arial"/>
+              </a:defRPr>
+            </a:pPr>
+            <a:r>
+              <a:rPr lang="en-US" sz="1800" b="1">
+                <a:solidFill>
+                  <a:srgbClr val="FAD02C"/>
+                </a:solidFill>
+                <a:latin typeface="Arial"/>
+              </a:rPr>
+              <a:t>Light of frequency 8.41 × 1014 Hz is incident on a metal surface. Electrons with their maximum speed of 7.5 ×</a:t>
+            </a:r>
+            <mc:AlternateContent xmlns:mc="http://schemas.openxmlformats.org/markup-compatibility/2006" xmlns:a14="http://schemas.microsoft.com/office/drawing/2010/main">
+              <mc:Choice Requires="a14">
+                <a14:m>
+                  <m:oMath xmlns:m="http://schemas.openxmlformats.org/officeDocument/2006/math">
+                    <m:r>
+                      <m:t>105</m:t>
+                    </m:r>
+                    <m:r>
+                      <m:t>m</m:t>
+                    </m:r>
+                    <m:sSup>
+                      <m:e>
+                        <m:r>
+                          <m:t>s</m:t>
+                        </m:r>
+                      </m:e>
+                      <m:sup>
+                        <m:r>
+                          <m:rPr>
+                            <m:sty m:val="p"/>
+                          </m:rPr>
+                          <m:t>−</m:t>
+                        </m:r>
+                        <m:r>
+                          <m:t>1</m:t>
+                        </m:r>
+                      </m:sup>
+                    </m:sSup>
+                  </m:oMath>
+                </a14:m>
+              </mc:Choice>
+            </mc:AlternateContent>
+            <a:r>
+              <a:rPr lang="en-US" sz="1800" b="1">
+                <a:solidFill>
+                  <a:srgbClr val="FAD02C"/>
+                </a:solidFill>
+                <a:latin typeface="Arial"/>
+              </a:rPr>
+              <a:t> </a:t>
+            </a:r>
+            <a:r>
+              <a:rPr lang="en-US" sz="1800" b="1">
+                <a:solidFill>
+                  <a:srgbClr val="FAD02C"/>
+                </a:solidFill>
+                <a:latin typeface="Arial"/>
+              </a:rPr>
+              <a:t>are ejected from the surface. Calculate the threshold frequency for photoemission of electrons. Also find the work function of the metal in electron volt (eV). Given Planck’s constant h = 6.625 ×</a:t>
+            </a:r>
+            <mc:AlternateContent xmlns:mc="http://schemas.openxmlformats.org/markup-compatibility/2006" xmlns:a14="http://schemas.microsoft.com/office/drawing/2010/main">
+              <mc:Choice Requires="a14">
+                <a14:m>
+                  <m:oMath xmlns:m="http://schemas.openxmlformats.org/officeDocument/2006/math">
+                    <m:sSup>
+                      <m:e>
+                        <m:r>
+                          <m:t>10</m:t>
+                        </m:r>
+                      </m:e>
+                      <m:sup>
+                        <m:r>
+                          <m:rPr>
+                            <m:sty m:val="p"/>
+                          </m:rPr>
+                          <m:t>−</m:t>
+                        </m:r>
+                        <m:r>
+                          <m:t>34</m:t>
+                        </m:r>
+                      </m:sup>
+                    </m:sSup>
+                    <m:r>
+                      <m:t>J</m:t>
+                    </m:r>
+                    <m:r>
+                      <m:t>S</m:t>
+                    </m:r>
+                  </m:oMath>
+                </a14:m>
+              </mc:Choice>
+            </mc:AlternateContent>
+            <a:r>
+              <a:rPr lang="en-US" sz="1800" b="1">
+                <a:solidFill>
+                  <a:srgbClr val="FAD02C"/>
+                </a:solidFill>
+                <a:latin typeface="Arial"/>
+              </a:rPr>
+              <a:t> </a:t>
+            </a:r>
+            <a:r>
+              <a:rPr lang="en-US" sz="1800" b="1">
+                <a:solidFill>
+                  <a:srgbClr val="FAD02C"/>
+                </a:solidFill>
+                <a:latin typeface="Arial"/>
+              </a:rPr>
+              <a:t>and mass of the electron 9.1 ×</a:t>
+            </a:r>
+            <mc:AlternateContent xmlns:mc="http://schemas.openxmlformats.org/markup-compatibility/2006" xmlns:a14="http://schemas.microsoft.com/office/drawing/2010/main">
+              <mc:Choice Requires="a14">
+                <a14:m>
+                  <m:oMath xmlns:m="http://schemas.openxmlformats.org/officeDocument/2006/math">
+                    <m:sSup>
+                      <m:e>
+                        <m:r>
+                          <m:t>10</m:t>
+                        </m:r>
+                      </m:e>
+                      <m:sup>
+                        <m:r>
+                          <m:rPr>
+                            <m:sty m:val="p"/>
+                          </m:rPr>
+                          <m:t>−</m:t>
+                        </m:r>
+                        <m:r>
+                          <m:t>31</m:t>
+                        </m:r>
+                      </m:sup>
+                    </m:sSup>
+                  </m:oMath>
+                </a14:m>
+              </mc:Choice>
+            </mc:AlternateContent>
+            <a:r>
+              <a:rPr lang="en-US" sz="1800" b="1">
+                <a:solidFill>
+                  <a:srgbClr val="FAD02C"/>
+                </a:solidFill>
+                <a:latin typeface="Arial"/>
+              </a:rPr>
+              <a:t> </a:t>
+            </a:r>
+            <a:r>
+              <a:rPr lang="en-US" sz="1800" b="1">
+                <a:solidFill>
+                  <a:srgbClr val="FAD02C"/>
+                </a:solidFill>
+                <a:latin typeface="Arial"/>
+              </a:rPr>
+              <a:t>Kg.</a:t>
             </a:r>
           </a:p>
         </p:txBody>
@@ -11053,7 +13394,7 @@
         <p:spPr>
           <a:xfrm>
             <a:off x="457200" y="182880"/>
-            <a:ext cx="1316736" cy="402336"/>
+            <a:ext cx="850392" cy="402336"/>
           </a:xfrm>
           <a:prstGeom prst="roundRect">
             <a:avLst/>
@@ -11141,7 +13482,7 @@
         <p:spPr>
           <a:xfrm>
             <a:off x="594360" y="182880"/>
-            <a:ext cx="1152144" cy="402336"/>
+            <a:ext cx="685800" cy="402336"/>
           </a:xfrm>
           <a:prstGeom prst="rect">
             <a:avLst/>
@@ -11162,7 +13503,7 @@
                 </a:solidFill>
                 <a:latin typeface="Arial"/>
               </a:rPr>
-              <a:t>2014S,2025</a:t>
+              <a:t>2021M</a:t>
             </a:r>
           </a:p>
         </p:txBody>
@@ -11213,15 +13554,164 @@
           </a:bodyPr>
           <a:lstStyle/>
           <a:p>
-            <a:pPr algn="l"/>
-            <a:r>
-              <a:rPr sz="1800" b="1">
-                <a:solidFill>
-                  <a:srgbClr val="FAD02C"/>
-                </a:solidFill>
-                <a:latin typeface="Arial"/>
-              </a:rPr>
-              <a:t>The work function of cesium metal is 2.14 ev. When light of frequency 6 × 1014 Hz is incident on the metal surface, photoemission of electrons occurs. Find Energy of incident photons Maximum kinetic energy of photoelectrons. Given, Planck’s constant h = 6.63 ×10⁻³⁴ Js, 1 ev = 1.6 ×10⁻¹⁹</a:t>
+            <a:pPr algn="l">
+              <a:defRPr sz="1800" b="1">
+                <a:solidFill>
+                  <a:srgbClr val="FAD02C"/>
+                </a:solidFill>
+                <a:latin typeface="Arial"/>
+              </a:defRPr>
+            </a:pPr>
+            <a:r>
+              <a:rPr lang="en-US" sz="1800" b="1">
+                <a:solidFill>
+                  <a:srgbClr val="FAD02C"/>
+                </a:solidFill>
+                <a:latin typeface="Arial"/>
+              </a:rPr>
+              <a:t>Light of frequency 7.21 × 1014 Hz is incident on a metal surface. The cut-off wavelength for</a:t>
+            </a:r>
+            <a:r>
+              <a:rPr lang="en-US" sz="1800" b="1">
+                <a:solidFill>
+                  <a:srgbClr val="FAD02C"/>
+                </a:solidFill>
+                <a:latin typeface="Arial"/>
+              </a:rPr>
+              <a:t> </a:t>
+            </a:r>
+            <a:r>
+              <a:rPr lang="en-US" sz="1800" b="1">
+                <a:solidFill>
+                  <a:srgbClr val="FAD02C"/>
+                </a:solidFill>
+                <a:latin typeface="Arial"/>
+              </a:rPr>
+              <a:t>photoelectric emission from the metal surface is 540 nm.</a:t>
+            </a:r>
+            <a:r>
+              <a:rPr lang="en-US" sz="1800" b="1">
+                <a:solidFill>
+                  <a:srgbClr val="FAD02C"/>
+                </a:solidFill>
+                <a:latin typeface="Arial"/>
+              </a:rPr>
+              <a:t> </a:t>
+            </a:r>
+            <a:r>
+              <a:rPr lang="en-US" sz="1800" b="1">
+                <a:solidFill>
+                  <a:srgbClr val="FAD02C"/>
+                </a:solidFill>
+                <a:latin typeface="Arial"/>
+              </a:rPr>
+              <a:t>Determine the maximum speed of the photoelectrons emitted from the surface.</a:t>
+            </a:r>
+            <a:r>
+              <a:rPr lang="en-US" sz="1800" b="1">
+                <a:solidFill>
+                  <a:srgbClr val="FAD02C"/>
+                </a:solidFill>
+                <a:latin typeface="Arial"/>
+              </a:rPr>
+              <a:t> </a:t>
+            </a:r>
+            <a:r>
+              <a:rPr lang="en-US" sz="1800" b="1">
+                <a:solidFill>
+                  <a:srgbClr val="FAD02C"/>
+                </a:solidFill>
+                <a:latin typeface="Arial"/>
+              </a:rPr>
+              <a:t>(Given: h =6.63 ×</a:t>
+            </a:r>
+            <mc:AlternateContent xmlns:mc="http://schemas.openxmlformats.org/markup-compatibility/2006" xmlns:a14="http://schemas.microsoft.com/office/drawing/2010/main">
+              <mc:Choice Requires="a14">
+                <a14:m>
+                  <m:oMath xmlns:m="http://schemas.openxmlformats.org/officeDocument/2006/math">
+                    <m:sSup>
+                      <m:e>
+                        <m:r>
+                          <m:t>10</m:t>
+                        </m:r>
+                      </m:e>
+                      <m:sup>
+                        <m:r>
+                          <m:rPr>
+                            <m:sty m:val="p"/>
+                          </m:rPr>
+                          <m:t>−</m:t>
+                        </m:r>
+                        <m:r>
+                          <m:t>34</m:t>
+                        </m:r>
+                      </m:sup>
+                    </m:sSup>
+                  </m:oMath>
+                </a14:m>
+              </mc:Choice>
+            </mc:AlternateContent>
+            <a:r>
+              <a:rPr lang="en-US" sz="1800" b="1">
+                <a:solidFill>
+                  <a:srgbClr val="FAD02C"/>
+                </a:solidFill>
+                <a:latin typeface="Arial"/>
+              </a:rPr>
+              <a:t> </a:t>
+            </a:r>
+            <a:r>
+              <a:rPr lang="en-US" sz="1800" b="1">
+                <a:solidFill>
+                  <a:srgbClr val="FAD02C"/>
+                </a:solidFill>
+                <a:latin typeface="Arial"/>
+              </a:rPr>
+              <a:t>Js, mass of an electron = 9.1 ×</a:t>
+            </a:r>
+            <mc:AlternateContent xmlns:mc="http://schemas.openxmlformats.org/markup-compatibility/2006" xmlns:a14="http://schemas.microsoft.com/office/drawing/2010/main">
+              <mc:Choice Requires="a14">
+                <a14:m>
+                  <m:oMath xmlns:m="http://schemas.openxmlformats.org/officeDocument/2006/math">
+                    <m:sSup>
+                      <m:e>
+                        <m:r>
+                          <m:t>10</m:t>
+                        </m:r>
+                      </m:e>
+                      <m:sup>
+                        <m:r>
+                          <m:rPr>
+                            <m:sty m:val="p"/>
+                          </m:rPr>
+                          <m:t>−</m:t>
+                        </m:r>
+                        <m:r>
+                          <m:t>31</m:t>
+                        </m:r>
+                      </m:sup>
+                    </m:sSup>
+                  </m:oMath>
+                </a14:m>
+              </mc:Choice>
+            </mc:AlternateContent>
+            <a:r>
+              <a:rPr lang="en-US" sz="1800" b="1">
+                <a:solidFill>
+                  <a:srgbClr val="FAD02C"/>
+                </a:solidFill>
+                <a:latin typeface="Arial"/>
+              </a:rPr>
+              <a:t> </a:t>
+            </a:r>
+            <a:r>
+              <a:rPr lang="en-US" sz="1800" b="1">
+                <a:solidFill>
+                  <a:srgbClr val="FAD02C"/>
+                </a:solidFill>
+                <a:latin typeface="Arial"/>
+              </a:rPr>
+              <a:t>kg).</a:t>
             </a:r>
           </a:p>
         </p:txBody>
@@ -11261,7 +13751,7 @@
         <p:spPr>
           <a:xfrm>
             <a:off x="457200" y="182880"/>
-            <a:ext cx="722376" cy="402336"/>
+            <a:ext cx="850392" cy="402336"/>
           </a:xfrm>
           <a:prstGeom prst="roundRect">
             <a:avLst/>
@@ -11349,7 +13839,7 @@
         <p:spPr>
           <a:xfrm>
             <a:off x="594360" y="182880"/>
-            <a:ext cx="557784" cy="402336"/>
+            <a:ext cx="685800" cy="402336"/>
           </a:xfrm>
           <a:prstGeom prst="rect">
             <a:avLst/>
@@ -11370,7 +13860,7 @@
                 </a:solidFill>
                 <a:latin typeface="Arial"/>
               </a:rPr>
-              <a:t>2018</a:t>
+              <a:t>2021M</a:t>
             </a:r>
           </a:p>
         </p:txBody>
@@ -11421,16 +13911,88 @@
           </a:bodyPr>
           <a:lstStyle/>
           <a:p>
-            <a:pPr algn="l"/>
-            <a:r>
-              <a:rPr sz="1800" b="1">
-                <a:solidFill>
-                  <a:srgbClr val="FAD02C"/>
-                </a:solidFill>
-                <a:latin typeface="Arial"/>
-              </a:rPr>
-              <a:t>Light of frequency 8.41 × 1014 Hz is incident on a metal surface. Electrons with their maximum speed of 7.5 ×105ms⁻¹ are ejected from the surface. Calculate the threshold frequency for photoemission of electrons. Also find the work function of the metal in electron volt (eV). Given Planck’s constant h = 6.625 ×10⁻³⁴JS and mass of the electron 9.1 ×10⁻³¹ Kg.</a:t>
-            </a:r>
+            <a:pPr algn="l">
+              <a:defRPr sz="1800" b="1">
+                <a:solidFill>
+                  <a:srgbClr val="FAD02C"/>
+                </a:solidFill>
+                <a:latin typeface="Arial"/>
+              </a:defRPr>
+            </a:pPr>
+            <a:r>
+              <a:rPr lang="en-US" sz="1800" b="1">
+                <a:solidFill>
+                  <a:srgbClr val="FAD02C"/>
+                </a:solidFill>
+                <a:latin typeface="Arial"/>
+              </a:rPr>
+              <a:t>The work function of caesium is 2.14 eV. Find</a:t>
+            </a:r>
+            <a:r>
+              <a:rPr lang="en-US" sz="1800" b="1">
+                <a:solidFill>
+                  <a:srgbClr val="FAD02C"/>
+                </a:solidFill>
+                <a:latin typeface="Arial"/>
+              </a:rPr>
+              <a:t> </a:t>
+            </a:r>
+            <a:r>
+              <a:rPr lang="en-US" sz="1800" b="1">
+                <a:solidFill>
+                  <a:srgbClr val="FAD02C"/>
+                </a:solidFill>
+                <a:latin typeface="Arial"/>
+              </a:rPr>
+              <a:t>(a) the threshold frequency for cesium and</a:t>
+            </a:r>
+            <a:r>
+              <a:rPr lang="en-US" sz="1800" b="1">
+                <a:solidFill>
+                  <a:srgbClr val="FAD02C"/>
+                </a:solidFill>
+                <a:latin typeface="Arial"/>
+              </a:rPr>
+              <a:t> </a:t>
+            </a:r>
+            <a:r>
+              <a:rPr lang="en-US" sz="1800" b="1">
+                <a:solidFill>
+                  <a:srgbClr val="FAD02C"/>
+                </a:solidFill>
+                <a:latin typeface="Arial"/>
+              </a:rPr>
+              <a:t>(b) the wavelength of the incident light if the photocurrent is brought to zero by a stopping potential of</a:t>
+            </a:r>
+            <a:r>
+              <a:rPr lang="en-US" sz="1800" b="1">
+                <a:solidFill>
+                  <a:srgbClr val="FAD02C"/>
+                </a:solidFill>
+                <a:latin typeface="Arial"/>
+              </a:rPr>
+              <a:t> </a:t>
+            </a:r>
+            <mc:AlternateContent xmlns:mc="http://schemas.openxmlformats.org/markup-compatibility/2006" xmlns:a14="http://schemas.microsoft.com/office/drawing/2010/main">
+              <mc:Choice Requires="a14">
+                <a14:m>
+                  <m:oMath xmlns:m="http://schemas.openxmlformats.org/officeDocument/2006/math">
+                    <m:r>
+                      <m:t>0.60</m:t>
+                    </m:r>
+                    <m:r>
+                      <m:t>V</m:t>
+                    </m:r>
+                    <m:r>
+                      <m:rPr>
+                        <m:sty m:val="p"/>
+                      </m:rPr>
+                      <m:t>.</m:t>
+                    </m:r>
+                  </m:oMath>
+                </a14:m>
+              </mc:Choice>
+            </mc:AlternateContent>
           </a:p>
         </p:txBody>
       </p:sp>
@@ -11469,7 +14031,7 @@
         <p:spPr>
           <a:xfrm>
             <a:off x="457200" y="182880"/>
-            <a:ext cx="850392" cy="402336"/>
+            <a:ext cx="923544" cy="402336"/>
           </a:xfrm>
           <a:prstGeom prst="roundRect">
             <a:avLst/>
@@ -11557,7 +14119,7 @@
         <p:spPr>
           <a:xfrm>
             <a:off x="594360" y="182880"/>
-            <a:ext cx="685800" cy="402336"/>
+            <a:ext cx="758952" cy="402336"/>
           </a:xfrm>
           <a:prstGeom prst="rect">
             <a:avLst/>
@@ -11578,7 +14140,7 @@
                 </a:solidFill>
                 <a:latin typeface="Arial"/>
               </a:rPr>
-              <a:t>2021M</a:t>
+              <a:t>2025-2</a:t>
             </a:r>
           </a:p>
         </p:txBody>
@@ -11629,16 +14191,96 @@
           </a:bodyPr>
           <a:lstStyle/>
           <a:p>
-            <a:pPr algn="l"/>
-            <a:r>
-              <a:rPr sz="1800" b="1">
-                <a:solidFill>
-                  <a:srgbClr val="FAD02C"/>
-                </a:solidFill>
-                <a:latin typeface="Arial"/>
-              </a:rPr>
-              <a:t>Light of frequency 7.21 × 1014 Hz is incident on a metal surface. The cut-off wavelength for photoelectric emission from the metal surface is 540 nm. Determine the maximum speed of the photoelectrons emitted from the surface. (Given: h =6.63 ×10⁻³⁴ Js, mass of an electron = 9.1 ×10⁻³¹ kg).</a:t>
-            </a:r>
+            <a:pPr algn="l">
+              <a:defRPr sz="1800" b="1">
+                <a:solidFill>
+                  <a:srgbClr val="FAD02C"/>
+                </a:solidFill>
+                <a:latin typeface="Arial"/>
+              </a:defRPr>
+            </a:pPr>
+            <a:r>
+              <a:rPr lang="en-US" sz="1800" b="1">
+                <a:solidFill>
+                  <a:srgbClr val="FAD02C"/>
+                </a:solidFill>
+                <a:latin typeface="Arial"/>
+              </a:rPr>
+              <a:t>The work function of a metal is 2.20 eV when radiation of frequency 6.50 ×</a:t>
+            </a:r>
+            <mc:AlternateContent xmlns:mc="http://schemas.openxmlformats.org/markup-compatibility/2006" xmlns:a14="http://schemas.microsoft.com/office/drawing/2010/main">
+              <mc:Choice Requires="a14">
+                <a14:m>
+                  <m:oMath xmlns:m="http://schemas.openxmlformats.org/officeDocument/2006/math">
+                    <m:r>
+                      <m:t>1014</m:t>
+                    </m:r>
+                    <m:r>
+                      <m:t>H</m:t>
+                    </m:r>
+                    <m:r>
+                      <m:t>z</m:t>
+                    </m:r>
+                  </m:oMath>
+                </a14:m>
+              </mc:Choice>
+            </mc:AlternateContent>
+            <a:r>
+              <a:rPr lang="en-US" sz="1800" b="1">
+                <a:solidFill>
+                  <a:srgbClr val="FAD02C"/>
+                </a:solidFill>
+                <a:latin typeface="Arial"/>
+              </a:rPr>
+              <a:t> </a:t>
+            </a:r>
+            <a:r>
+              <a:rPr lang="en-US" sz="1800" b="1">
+                <a:solidFill>
+                  <a:srgbClr val="FAD02C"/>
+                </a:solidFill>
+                <a:latin typeface="Arial"/>
+              </a:rPr>
+              <a:t>incident on the metal surface photo emission of electrons occurs. Calculate a) energy of incident photon and b) stopping potential of photoelectrons. (Given h = 6.63 × 10–34 Js and</a:t>
+            </a:r>
+            <a:r>
+              <a:rPr lang="en-US" sz="1800" b="1">
+                <a:solidFill>
+                  <a:srgbClr val="FAD02C"/>
+                </a:solidFill>
+                <a:latin typeface="Arial"/>
+              </a:rPr>
+              <a:t> </a:t>
+            </a:r>
+            <a:r>
+              <a:rPr lang="en-US" sz="1800" b="1">
+                <a:solidFill>
+                  <a:srgbClr val="FAD02C"/>
+                </a:solidFill>
+                <a:latin typeface="Arial"/>
+              </a:rPr>
+              <a:t>e = 1.6 × 10–</a:t>
+            </a:r>
+            <mc:AlternateContent xmlns:mc="http://schemas.openxmlformats.org/markup-compatibility/2006" xmlns:a14="http://schemas.microsoft.com/office/drawing/2010/main">
+              <mc:Choice Requires="a14">
+                <a14:m>
+                  <m:oMath xmlns:m="http://schemas.openxmlformats.org/officeDocument/2006/math">
+                    <m:r>
+                      <m:t>19</m:t>
+                    </m:r>
+                    <m:r>
+                      <m:t>C</m:t>
+                    </m:r>
+                    <m:r>
+                      <m:rPr>
+                        <m:sty m:val="p"/>
+                      </m:rPr>
+                      <m:t>)</m:t>
+                    </m:r>
+                  </m:oMath>
+                </a14:m>
+              </mc:Choice>
+            </mc:AlternateContent>
           </a:p>
         </p:txBody>
       </p:sp>
@@ -11677,7 +14319,7 @@
         <p:spPr>
           <a:xfrm>
             <a:off x="457200" y="182880"/>
-            <a:ext cx="850392" cy="402336"/>
+            <a:ext cx="886968" cy="402336"/>
           </a:xfrm>
           <a:prstGeom prst="roundRect">
             <a:avLst/>
@@ -11765,7 +14407,7 @@
         <p:spPr>
           <a:xfrm>
             <a:off x="594360" y="182880"/>
-            <a:ext cx="685800" cy="402336"/>
+            <a:ext cx="722376" cy="402336"/>
           </a:xfrm>
           <a:prstGeom prst="rect">
             <a:avLst/>
@@ -11786,7 +14428,7 @@
                 </a:solidFill>
                 <a:latin typeface="Arial"/>
               </a:rPr>
-              <a:t>2021M</a:t>
+              <a:t>2025-1</a:t>
             </a:r>
           </a:p>
         </p:txBody>
@@ -11837,16 +14479,114 @@
           </a:bodyPr>
           <a:lstStyle/>
           <a:p>
-            <a:pPr algn="l"/>
-            <a:r>
-              <a:rPr sz="1800" b="1">
-                <a:solidFill>
-                  <a:srgbClr val="FAD02C"/>
-                </a:solidFill>
-                <a:latin typeface="Arial"/>
-              </a:rPr>
-              <a:t>The work function of caesium is 2.14 eV. Find (a) the threshold frequency for cesium and (b) the wavelength of the incident light if the photocurrent is brought to zero by a stopping potential of 0.60V.</a:t>
-            </a:r>
+            <a:pPr algn="l">
+              <a:defRPr sz="1800" b="1">
+                <a:solidFill>
+                  <a:srgbClr val="FAD02C"/>
+                </a:solidFill>
+                <a:latin typeface="Arial"/>
+              </a:defRPr>
+            </a:pPr>
+            <a:r>
+              <a:rPr lang="en-US" sz="1800" b="1">
+                <a:solidFill>
+                  <a:srgbClr val="FAD02C"/>
+                </a:solidFill>
+                <a:latin typeface="Arial"/>
+              </a:rPr>
+              <a:t>When a light radiation of energy 3 eV falls on metal surface, photoelectrons with a maximum kinetic energy 1eV are emitted from the surface. Find the threshold frequency for the metal surface. (Given: Planck’s constant</a:t>
+            </a:r>
+            <a:r>
+              <a:rPr lang="en-US" sz="1800" b="1">
+                <a:solidFill>
+                  <a:srgbClr val="FAD02C"/>
+                </a:solidFill>
+                <a:latin typeface="Arial"/>
+              </a:rPr>
+              <a:t> </a:t>
+            </a:r>
+            <mc:AlternateContent xmlns:mc="http://schemas.openxmlformats.org/markup-compatibility/2006" xmlns:a14="http://schemas.microsoft.com/office/drawing/2010/main">
+              <mc:Choice Requires="a14">
+                <a14:m>
+                  <m:oMath xmlns:m="http://schemas.openxmlformats.org/officeDocument/2006/math">
+                    <m:r>
+                      <m:rPr>
+                        <m:sty m:val="p"/>
+                      </m:rPr>
+                      <m:t>=</m:t>
+                    </m:r>
+                    <m:r>
+                      <m:t>6.63</m:t>
+                    </m:r>
+                    <m:r>
+                      <m:rPr>
+                        <m:sty m:val="p"/>
+                      </m:rPr>
+                      <m:t>×</m:t>
+                    </m:r>
+                    <m:sSup>
+                      <m:e>
+                        <m:r>
+                          <m:t>10</m:t>
+                        </m:r>
+                      </m:e>
+                      <m:sup>
+                        <m:r>
+                          <m:rPr>
+                            <m:sty m:val="p"/>
+                          </m:rPr>
+                          <m:t>−</m:t>
+                        </m:r>
+                        <m:r>
+                          <m:t>34</m:t>
+                        </m:r>
+                      </m:sup>
+                    </m:sSup>
+                    <m:r>
+                      <m:t>J</m:t>
+                    </m:r>
+                    <m:r>
+                      <m:t>s</m:t>
+                    </m:r>
+                    <m:r>
+                      <m:rPr>
+                        <m:sty m:val="p"/>
+                      </m:rPr>
+                      <m:t>;</m:t>
+                    </m:r>
+                  </m:oMath>
+                </a14:m>
+              </mc:Choice>
+            </mc:AlternateContent>
+            <a:r>
+              <a:rPr lang="en-US" sz="1800" b="1">
+                <a:solidFill>
+                  <a:srgbClr val="FAD02C"/>
+                </a:solidFill>
+                <a:latin typeface="Arial"/>
+              </a:rPr>
+              <a:t>) Charge on the electron e = 1.6× 10–</a:t>
+            </a:r>
+            <mc:AlternateContent xmlns:mc="http://schemas.openxmlformats.org/markup-compatibility/2006" xmlns:a14="http://schemas.microsoft.com/office/drawing/2010/main">
+              <mc:Choice Requires="a14">
+                <a14:m>
+                  <m:oMath xmlns:m="http://schemas.openxmlformats.org/officeDocument/2006/math">
+                    <m:r>
+                      <m:t>19</m:t>
+                    </m:r>
+                    <m:r>
+                      <m:t>C</m:t>
+                    </m:r>
+                    <m:r>
+                      <m:rPr>
+                        <m:sty m:val="p"/>
+                      </m:rPr>
+                      <m:t>)</m:t>
+                    </m:r>
+                  </m:oMath>
+                </a14:m>
+              </mc:Choice>
+            </mc:AlternateContent>
           </a:p>
         </p:txBody>
       </p:sp>
@@ -11994,7 +14734,7 @@
                 </a:solidFill>
                 <a:latin typeface="Arial"/>
               </a:rPr>
-              <a:t>2025-2</a:t>
+              <a:t>2026-2</a:t>
             </a:r>
           </a:p>
         </p:txBody>
@@ -12045,432 +14785,126 @@
           </a:bodyPr>
           <a:lstStyle/>
           <a:p>
-            <a:pPr algn="l"/>
-            <a:r>
-              <a:rPr sz="1800" b="1">
-                <a:solidFill>
-                  <a:srgbClr val="FAD02C"/>
-                </a:solidFill>
-                <a:latin typeface="Arial"/>
-              </a:rPr>
-              <a:t>The work function of a metal is 2.20 eV when radiation of frequency 6.50 ×1014Hz incident on the metal surface photo emission of electrons occurs. Calculate a) energy of incident photon and b) stopping potential of photoelectrons. (Given h = 6.63 × 10–34 Js and e = 1.6 × 10–19C)</a:t>
-            </a:r>
-          </a:p>
-        </p:txBody>
-      </p:sp>
-    </p:spTree>
-  </p:cSld>
-  <p:clrMapOvr>
-    <a:masterClrMapping/>
-  </p:clrMapOvr>
-</p:sld>
-</file>
-
-<file path=ppt/slides/slide47.xml><?xml version="1.0" encoding="utf-8"?>
-<p:sld xmlns:a="http://schemas.openxmlformats.org/drawingml/2006/main" xmlns:p="http://schemas.openxmlformats.org/presentationml/2006/main" xmlns:r="http://schemas.openxmlformats.org/officeDocument/2006/relationships">
-  <p:cSld>
-    <p:bg>
-      <p:bgPr>
-        <a:solidFill>
-          <a:srgbClr val="050505"/>
-        </a:solidFill>
-        <a:effectLst/>
-      </p:bgPr>
-    </p:bg>
-    <p:spTree>
-      <p:nvGrpSpPr>
-        <p:cNvPr id="1" name=""/>
-        <p:cNvGrpSpPr/>
-        <p:nvPr/>
-      </p:nvGrpSpPr>
-      <p:grpSpPr/>
-      <p:sp>
-        <p:nvSpPr>
-          <p:cNvPr id="2" name="Rounded Rectangle 1"/>
-          <p:cNvSpPr/>
-          <p:nvPr/>
-        </p:nvSpPr>
-        <p:spPr>
-          <a:xfrm>
-            <a:off x="457200" y="182880"/>
-            <a:ext cx="886968" cy="402336"/>
-          </a:xfrm>
-          <a:prstGeom prst="roundRect">
-            <a:avLst/>
-          </a:prstGeom>
-          <a:solidFill>
-            <a:srgbClr val="1A1608"/>
-          </a:solidFill>
-          <a:ln w="9525">
-            <a:solidFill>
-              <a:srgbClr val="FAD02C"/>
-            </a:solidFill>
-          </a:ln>
-        </p:spPr>
-        <p:style>
-          <a:lnRef idx="1">
-            <a:schemeClr val="accent1"/>
-          </a:lnRef>
-          <a:fillRef idx="3">
-            <a:schemeClr val="accent1"/>
-          </a:fillRef>
-          <a:effectRef idx="2">
-            <a:schemeClr val="accent1"/>
-          </a:effectRef>
-          <a:fontRef idx="minor">
-            <a:schemeClr val="lt1"/>
-          </a:fontRef>
-        </p:style>
-        <p:txBody>
-          <a:bodyPr rtlCol="0" anchor="ctr"/>
-          <a:lstStyle/>
-          <a:p>
-            <a:pPr algn="ctr"/>
-          </a:p>
-        </p:txBody>
-      </p:sp>
-      <p:sp>
-        <p:nvSpPr>
-          <p:cNvPr id="3" name="Rectangle 2"/>
-          <p:cNvSpPr/>
-          <p:nvPr/>
-        </p:nvSpPr>
-        <p:spPr>
-          <a:xfrm>
-            <a:off x="484632" y="228600"/>
-            <a:ext cx="54864" cy="310896"/>
-          </a:xfrm>
-          <a:prstGeom prst="rect">
-            <a:avLst/>
-          </a:prstGeom>
-          <a:solidFill>
-            <a:srgbClr val="FAD02C"/>
-          </a:solidFill>
-          <a:ln>
-            <a:noFill/>
-          </a:ln>
-        </p:spPr>
-        <p:style>
-          <a:lnRef idx="1">
-            <a:schemeClr val="accent1"/>
-          </a:lnRef>
-          <a:fillRef idx="3">
-            <a:schemeClr val="accent1"/>
-          </a:fillRef>
-          <a:effectRef idx="2">
-            <a:schemeClr val="accent1"/>
-          </a:effectRef>
-          <a:fontRef idx="minor">
-            <a:schemeClr val="lt1"/>
-          </a:fontRef>
-        </p:style>
-        <p:txBody>
-          <a:bodyPr rtlCol="0" anchor="ctr"/>
-          <a:lstStyle/>
-          <a:p>
-            <a:pPr algn="ctr"/>
-          </a:p>
-        </p:txBody>
-      </p:sp>
-      <p:sp>
-        <p:nvSpPr>
-          <p:cNvPr id="4" name="TextBox 3"/>
-          <p:cNvSpPr txBox="1"/>
-          <p:nvPr/>
-        </p:nvSpPr>
-        <p:spPr>
-          <a:xfrm>
-            <a:off x="594360" y="182880"/>
-            <a:ext cx="722376" cy="402336"/>
-          </a:xfrm>
-          <a:prstGeom prst="rect">
-            <a:avLst/>
-          </a:prstGeom>
-          <a:noFill/>
-        </p:spPr>
-        <p:txBody>
-          <a:bodyPr wrap="none" anchor="ctr" lIns="0" rIns="0" tIns="0" bIns="0">
-            <a:spAutoFit/>
-          </a:bodyPr>
-          <a:lstStyle/>
-          <a:p>
-            <a:pPr algn="l"/>
-            <a:r>
-              <a:rPr sz="1500" b="1">
-                <a:solidFill>
-                  <a:srgbClr val="FAD02C"/>
-                </a:solidFill>
-                <a:latin typeface="Arial"/>
-              </a:rPr>
-              <a:t>2025-1</a:t>
-            </a:r>
-          </a:p>
-        </p:txBody>
-      </p:sp>
-      <p:pic>
-        <p:nvPicPr>
-          <p:cNvPr id="5" name="Picture 4" descr="simplified_Logo.png"/>
-          <p:cNvPicPr>
-            <a:picLocks noChangeAspect="1"/>
-          </p:cNvPicPr>
-          <p:nvPr/>
-        </p:nvPicPr>
-        <p:blipFill>
-          <a:blip r:embed="rId2"/>
-          <a:stretch>
-            <a:fillRect/>
-          </a:stretch>
-        </p:blipFill>
-        <p:spPr>
-          <a:xfrm>
-            <a:off x="10360152" y="91440"/>
-            <a:ext cx="1371600" cy="476178"/>
-          </a:xfrm>
-          <a:prstGeom prst="rect">
-            <a:avLst/>
-          </a:prstGeom>
-        </p:spPr>
-      </p:pic>
-      <p:sp>
-        <p:nvSpPr>
-          <p:cNvPr id="6" name="TextBox 5"/>
-          <p:cNvSpPr txBox="1"/>
-          <p:nvPr/>
-        </p:nvSpPr>
-        <p:spPr>
-          <a:xfrm>
-            <a:off x="457200" y="731520"/>
-            <a:ext cx="11274552" cy="2743200"/>
-          </a:xfrm>
-          <a:prstGeom prst="rect">
-            <a:avLst/>
-          </a:prstGeom>
-          <a:noFill/>
-        </p:spPr>
-        <p:txBody>
-          <a:bodyPr wrap="square" lIns="0" rIns="0" tIns="0" bIns="0">
-            <a:spAutoFit/>
-          </a:bodyPr>
-          <a:lstStyle/>
-          <a:p>
-            <a:pPr algn="l"/>
-            <a:r>
-              <a:rPr sz="1800" b="1">
-                <a:solidFill>
-                  <a:srgbClr val="FAD02C"/>
-                </a:solidFill>
-                <a:latin typeface="Arial"/>
-              </a:rPr>
-              <a:t>When a light radiation of energy 3 eV falls on metal surface, photoelectrons with a maximum kinetic energy 1eV are emitted from the surface. Find the threshold frequency for the metal surface. (Given: Planck’s constant = 6.63×10⁻³⁴ Js;) Charge on the electron e = 1.6× 10–19C)</a:t>
-            </a:r>
-          </a:p>
-        </p:txBody>
-      </p:sp>
-    </p:spTree>
-  </p:cSld>
-  <p:clrMapOvr>
-    <a:masterClrMapping/>
-  </p:clrMapOvr>
-</p:sld>
-</file>
-
-<file path=ppt/slides/slide48.xml><?xml version="1.0" encoding="utf-8"?>
-<p:sld xmlns:a="http://schemas.openxmlformats.org/drawingml/2006/main" xmlns:p="http://schemas.openxmlformats.org/presentationml/2006/main" xmlns:r="http://schemas.openxmlformats.org/officeDocument/2006/relationships">
-  <p:cSld>
-    <p:bg>
-      <p:bgPr>
-        <a:solidFill>
-          <a:srgbClr val="050505"/>
-        </a:solidFill>
-        <a:effectLst/>
-      </p:bgPr>
-    </p:bg>
-    <p:spTree>
-      <p:nvGrpSpPr>
-        <p:cNvPr id="1" name=""/>
-        <p:cNvGrpSpPr/>
-        <p:nvPr/>
-      </p:nvGrpSpPr>
-      <p:grpSpPr/>
-      <p:sp>
-        <p:nvSpPr>
-          <p:cNvPr id="2" name="Rounded Rectangle 1"/>
-          <p:cNvSpPr/>
-          <p:nvPr/>
-        </p:nvSpPr>
-        <p:spPr>
-          <a:xfrm>
-            <a:off x="457200" y="182880"/>
-            <a:ext cx="923544" cy="402336"/>
-          </a:xfrm>
-          <a:prstGeom prst="roundRect">
-            <a:avLst/>
-          </a:prstGeom>
-          <a:solidFill>
-            <a:srgbClr val="1A1608"/>
-          </a:solidFill>
-          <a:ln w="9525">
-            <a:solidFill>
-              <a:srgbClr val="FAD02C"/>
-            </a:solidFill>
-          </a:ln>
-        </p:spPr>
-        <p:style>
-          <a:lnRef idx="1">
-            <a:schemeClr val="accent1"/>
-          </a:lnRef>
-          <a:fillRef idx="3">
-            <a:schemeClr val="accent1"/>
-          </a:fillRef>
-          <a:effectRef idx="2">
-            <a:schemeClr val="accent1"/>
-          </a:effectRef>
-          <a:fontRef idx="minor">
-            <a:schemeClr val="lt1"/>
-          </a:fontRef>
-        </p:style>
-        <p:txBody>
-          <a:bodyPr rtlCol="0" anchor="ctr"/>
-          <a:lstStyle/>
-          <a:p>
-            <a:pPr algn="ctr"/>
-          </a:p>
-        </p:txBody>
-      </p:sp>
-      <p:sp>
-        <p:nvSpPr>
-          <p:cNvPr id="3" name="Rectangle 2"/>
-          <p:cNvSpPr/>
-          <p:nvPr/>
-        </p:nvSpPr>
-        <p:spPr>
-          <a:xfrm>
-            <a:off x="484632" y="228600"/>
-            <a:ext cx="54864" cy="310896"/>
-          </a:xfrm>
-          <a:prstGeom prst="rect">
-            <a:avLst/>
-          </a:prstGeom>
-          <a:solidFill>
-            <a:srgbClr val="FAD02C"/>
-          </a:solidFill>
-          <a:ln>
-            <a:noFill/>
-          </a:ln>
-        </p:spPr>
-        <p:style>
-          <a:lnRef idx="1">
-            <a:schemeClr val="accent1"/>
-          </a:lnRef>
-          <a:fillRef idx="3">
-            <a:schemeClr val="accent1"/>
-          </a:fillRef>
-          <a:effectRef idx="2">
-            <a:schemeClr val="accent1"/>
-          </a:effectRef>
-          <a:fontRef idx="minor">
-            <a:schemeClr val="lt1"/>
-          </a:fontRef>
-        </p:style>
-        <p:txBody>
-          <a:bodyPr rtlCol="0" anchor="ctr"/>
-          <a:lstStyle/>
-          <a:p>
-            <a:pPr algn="ctr"/>
-          </a:p>
-        </p:txBody>
-      </p:sp>
-      <p:sp>
-        <p:nvSpPr>
-          <p:cNvPr id="4" name="TextBox 3"/>
-          <p:cNvSpPr txBox="1"/>
-          <p:nvPr/>
-        </p:nvSpPr>
-        <p:spPr>
-          <a:xfrm>
-            <a:off x="594360" y="182880"/>
-            <a:ext cx="758952" cy="402336"/>
-          </a:xfrm>
-          <a:prstGeom prst="rect">
-            <a:avLst/>
-          </a:prstGeom>
-          <a:noFill/>
-        </p:spPr>
-        <p:txBody>
-          <a:bodyPr wrap="none" anchor="ctr" lIns="0" rIns="0" tIns="0" bIns="0">
-            <a:spAutoFit/>
-          </a:bodyPr>
-          <a:lstStyle/>
-          <a:p>
-            <a:pPr algn="l"/>
-            <a:r>
-              <a:rPr sz="1500" b="1">
-                <a:solidFill>
-                  <a:srgbClr val="FAD02C"/>
-                </a:solidFill>
-                <a:latin typeface="Arial"/>
-              </a:rPr>
-              <a:t>2026-2</a:t>
-            </a:r>
-          </a:p>
-        </p:txBody>
-      </p:sp>
-      <p:pic>
-        <p:nvPicPr>
-          <p:cNvPr id="5" name="Picture 4" descr="simplified_Logo.png"/>
-          <p:cNvPicPr>
-            <a:picLocks noChangeAspect="1"/>
-          </p:cNvPicPr>
-          <p:nvPr/>
-        </p:nvPicPr>
-        <p:blipFill>
-          <a:blip r:embed="rId2"/>
-          <a:stretch>
-            <a:fillRect/>
-          </a:stretch>
-        </p:blipFill>
-        <p:spPr>
-          <a:xfrm>
-            <a:off x="10360152" y="91440"/>
-            <a:ext cx="1371600" cy="476178"/>
-          </a:xfrm>
-          <a:prstGeom prst="rect">
-            <a:avLst/>
-          </a:prstGeom>
-        </p:spPr>
-      </p:pic>
-      <p:sp>
-        <p:nvSpPr>
-          <p:cNvPr id="6" name="TextBox 5"/>
-          <p:cNvSpPr txBox="1"/>
-          <p:nvPr/>
-        </p:nvSpPr>
-        <p:spPr>
-          <a:xfrm>
-            <a:off x="457200" y="731520"/>
-            <a:ext cx="11274552" cy="2743200"/>
-          </a:xfrm>
-          <a:prstGeom prst="rect">
-            <a:avLst/>
-          </a:prstGeom>
-          <a:noFill/>
-        </p:spPr>
-        <p:txBody>
-          <a:bodyPr wrap="square" lIns="0" rIns="0" tIns="0" bIns="0">
-            <a:spAutoFit/>
-          </a:bodyPr>
-          <a:lstStyle/>
-          <a:p>
-            <a:pPr algn="l"/>
-            <a:r>
-              <a:rPr sz="1800" b="1">
-                <a:solidFill>
-                  <a:srgbClr val="FAD02C"/>
-                </a:solidFill>
-                <a:latin typeface="Arial"/>
-              </a:rPr>
-              <a:t>The work function of cesium metal is 2.14 ev. When light of frequency 6 × 1014 Hz is incident on cesium surface, find the maximum kinetic energy of photoelectrons emitted. (Given: Planck’s constant, h=6.63×10⁻³⁴ Js and e = 1.6 10–19C).</a:t>
-            </a:r>
+            <a:pPr algn="l">
+              <a:defRPr sz="1800" b="1">
+                <a:solidFill>
+                  <a:srgbClr val="FAD02C"/>
+                </a:solidFill>
+                <a:latin typeface="Arial"/>
+              </a:defRPr>
+            </a:pPr>
+            <a:r>
+              <a:rPr lang="en-US" sz="1800" b="1">
+                <a:solidFill>
+                  <a:srgbClr val="FAD02C"/>
+                </a:solidFill>
+                <a:latin typeface="Arial"/>
+              </a:rPr>
+              <a:t>The work function of cesium metal is 2.14 ev. When light of frequency 6 × 1014 Hz is incident on cesium surface, find the maximum kinetic energy of photoelectrons emitted.</a:t>
+            </a:r>
+            <a:r>
+              <a:rPr lang="en-US" sz="1800" b="1">
+                <a:solidFill>
+                  <a:srgbClr val="FAD02C"/>
+                </a:solidFill>
+                <a:latin typeface="Arial"/>
+              </a:rPr>
+              <a:t> </a:t>
+            </a:r>
+            <a:r>
+              <a:rPr lang="en-US" sz="1800" b="1">
+                <a:solidFill>
+                  <a:srgbClr val="FAD02C"/>
+                </a:solidFill>
+                <a:latin typeface="Arial"/>
+              </a:rPr>
+              <a:t>(Given: Planck’s constant, h=</a:t>
+            </a:r>
+            <mc:AlternateContent xmlns:mc="http://schemas.openxmlformats.org/markup-compatibility/2006" xmlns:a14="http://schemas.microsoft.com/office/drawing/2010/main">
+              <mc:Choice Requires="a14">
+                <a14:m>
+                  <m:oMath xmlns:m="http://schemas.openxmlformats.org/officeDocument/2006/math">
+                    <m:r>
+                      <m:t>6.63</m:t>
+                    </m:r>
+                    <m:r>
+                      <m:rPr>
+                        <m:sty m:val="p"/>
+                      </m:rPr>
+                      <m:t>×</m:t>
+                    </m:r>
+                    <m:sSup>
+                      <m:e>
+                        <m:r>
+                          <m:t>10</m:t>
+                        </m:r>
+                      </m:e>
+                      <m:sup>
+                        <m:r>
+                          <m:rPr>
+                            <m:sty m:val="p"/>
+                          </m:rPr>
+                          <m:t>−</m:t>
+                        </m:r>
+                        <m:r>
+                          <m:t>34</m:t>
+                        </m:r>
+                      </m:sup>
+                    </m:sSup>
+                    <m:r>
+                      <m:t>J</m:t>
+                    </m:r>
+                    <m:r>
+                      <m:t>s</m:t>
+                    </m:r>
+                  </m:oMath>
+                </a14:m>
+              </mc:Choice>
+            </mc:AlternateContent>
+            <a:r>
+              <a:rPr lang="en-US" sz="1800" b="1">
+                <a:solidFill>
+                  <a:srgbClr val="FAD02C"/>
+                </a:solidFill>
+                <a:latin typeface="Arial"/>
+              </a:rPr>
+              <a:t> </a:t>
+            </a:r>
+            <a:r>
+              <a:rPr lang="en-US" sz="1800" b="1">
+                <a:solidFill>
+                  <a:srgbClr val="FAD02C"/>
+                </a:solidFill>
+                <a:latin typeface="Arial"/>
+              </a:rPr>
+              <a:t>and e = 1.6 10–</a:t>
+            </a:r>
+            <mc:AlternateContent xmlns:mc="http://schemas.openxmlformats.org/markup-compatibility/2006" xmlns:a14="http://schemas.microsoft.com/office/drawing/2010/main">
+              <mc:Choice Requires="a14">
+                <a14:m>
+                  <m:oMath xmlns:m="http://schemas.openxmlformats.org/officeDocument/2006/math">
+                    <m:r>
+                      <m:t>19</m:t>
+                    </m:r>
+                    <m:r>
+                      <m:t>C</m:t>
+                    </m:r>
+                    <m:r>
+                      <m:rPr>
+                        <m:sty m:val="p"/>
+                      </m:rPr>
+                      <m:t>)</m:t>
+                    </m:r>
+                    <m:r>
+                      <m:rPr>
+                        <m:sty m:val="p"/>
+                      </m:rPr>
+                      <m:t>.</m:t>
+                    </m:r>
+                  </m:oMath>
+                </a14:m>
+              </mc:Choice>
+            </mc:AlternateContent>
           </a:p>
         </p:txBody>
       </p:sp>
@@ -13053,15 +15487,158 @@
           </a:bodyPr>
           <a:lstStyle/>
           <a:p>
-            <a:pPr algn="l"/>
-            <a:r>
-              <a:rPr sz="1800" b="1">
-                <a:solidFill>
-                  <a:srgbClr val="FAD02C"/>
-                </a:solidFill>
-                <a:latin typeface="Arial"/>
-              </a:rPr>
-              <a:t>If Planck’s constant and basic unit of electric charge are ’h’ and ’e’ respectively, then in photoelectric effect, the graph between stopping potential (V₀) and frequency (γ) is a straight line with slope equal to _______.</a:t>
+            <a:pPr algn="l">
+              <a:defRPr sz="1800" b="1">
+                <a:solidFill>
+                  <a:srgbClr val="FAD02C"/>
+                </a:solidFill>
+                <a:latin typeface="Arial"/>
+              </a:defRPr>
+            </a:pPr>
+            <a:r>
+              <a:rPr lang="en-US" sz="1800" b="1">
+                <a:solidFill>
+                  <a:srgbClr val="FAD02C"/>
+                </a:solidFill>
+                <a:latin typeface="Arial"/>
+              </a:rPr>
+              <a:t>If Planck’s constant and basic unit of electric charge are</a:t>
+            </a:r>
+            <a:r>
+              <a:rPr lang="en-US" sz="1800" b="1">
+                <a:solidFill>
+                  <a:srgbClr val="FAD02C"/>
+                </a:solidFill>
+                <a:latin typeface="Arial"/>
+              </a:rPr>
+              <a:t> </a:t>
+            </a:r>
+            <a:r>
+              <a:rPr lang="en-US" sz="1800" b="1">
+                <a:solidFill>
+                  <a:srgbClr val="FAD02C"/>
+                </a:solidFill>
+                <a:latin typeface="Arial"/>
+              </a:rPr>
+              <a:t>‘h’</a:t>
+            </a:r>
+            <a:r>
+              <a:rPr lang="en-US" sz="1800" b="1">
+                <a:solidFill>
+                  <a:srgbClr val="FAD02C"/>
+                </a:solidFill>
+                <a:latin typeface="Arial"/>
+              </a:rPr>
+              <a:t> </a:t>
+            </a:r>
+            <a:r>
+              <a:rPr lang="en-US" sz="1800" b="1">
+                <a:solidFill>
+                  <a:srgbClr val="FAD02C"/>
+                </a:solidFill>
+                <a:latin typeface="Arial"/>
+              </a:rPr>
+              <a:t>and</a:t>
+            </a:r>
+            <a:r>
+              <a:rPr lang="en-US" sz="1800" b="1">
+                <a:solidFill>
+                  <a:srgbClr val="FAD02C"/>
+                </a:solidFill>
+                <a:latin typeface="Arial"/>
+              </a:rPr>
+              <a:t> </a:t>
+            </a:r>
+            <a:r>
+              <a:rPr lang="en-US" sz="1800" b="1">
+                <a:solidFill>
+                  <a:srgbClr val="FAD02C"/>
+                </a:solidFill>
+                <a:latin typeface="Arial"/>
+              </a:rPr>
+              <a:t>‘e’</a:t>
+            </a:r>
+            <a:r>
+              <a:rPr lang="en-US" sz="1800" b="1">
+                <a:solidFill>
+                  <a:srgbClr val="FAD02C"/>
+                </a:solidFill>
+                <a:latin typeface="Arial"/>
+              </a:rPr>
+              <a:t> </a:t>
+            </a:r>
+            <a:r>
+              <a:rPr lang="en-US" sz="1800" b="1">
+                <a:solidFill>
+                  <a:srgbClr val="FAD02C"/>
+                </a:solidFill>
+                <a:latin typeface="Arial"/>
+              </a:rPr>
+              <a:t>respectively, then in photoelectric effect, the graph between stopping potential</a:t>
+            </a:r>
+            <a:r>
+              <a:rPr lang="en-US" sz="1800" b="1">
+                <a:solidFill>
+                  <a:srgbClr val="FAD02C"/>
+                </a:solidFill>
+                <a:latin typeface="Arial"/>
+              </a:rPr>
+              <a:t> </a:t>
+            </a:r>
+            <mc:AlternateContent xmlns:mc="http://schemas.openxmlformats.org/markup-compatibility/2006" xmlns:a14="http://schemas.microsoft.com/office/drawing/2010/main">
+              <mc:Choice Requires="a14">
+                <a14:m>
+                  <m:oMath xmlns:m="http://schemas.openxmlformats.org/officeDocument/2006/math">
+                    <m:r>
+                      <m:rPr>
+                        <m:sty m:val="p"/>
+                      </m:rPr>
+                      <m:t>(</m:t>
+                    </m:r>
+                    <m:sSub>
+                      <m:e>
+                        <m:r>
+                          <m:t>V</m:t>
+                        </m:r>
+                      </m:e>
+                      <m:sub>
+                        <m:r>
+                          <m:t>0</m:t>
+                        </m:r>
+                      </m:sub>
+                    </m:sSub>
+                  </m:oMath>
+                </a14:m>
+              </mc:Choice>
+            </mc:AlternateContent>
+            <a:r>
+              <a:rPr lang="en-US" sz="1800" b="1">
+                <a:solidFill>
+                  <a:srgbClr val="FAD02C"/>
+                </a:solidFill>
+                <a:latin typeface="Arial"/>
+              </a:rPr>
+              <a:t>) and frequency (</a:t>
+            </a:r>
+            <mc:AlternateContent xmlns:mc="http://schemas.openxmlformats.org/markup-compatibility/2006" xmlns:a14="http://schemas.microsoft.com/office/drawing/2010/main">
+              <mc:Choice Requires="a14">
+                <a14:m>
+                  <m:oMath xmlns:m="http://schemas.openxmlformats.org/officeDocument/2006/math">
+                    <m:r>
+                      <m:t>γ</m:t>
+                    </m:r>
+                  </m:oMath>
+                </a14:m>
+              </mc:Choice>
+            </mc:AlternateContent>
+            <a:r>
+              <a:rPr lang="en-US" sz="1800" b="1">
+                <a:solidFill>
+                  <a:srgbClr val="FAD02C"/>
+                </a:solidFill>
+                <a:latin typeface="Arial"/>
+              </a:rPr>
+              <a:t>) is a straight line with slope equal to _______.</a:t>
             </a:r>
           </a:p>
         </p:txBody>
@@ -14205,15 +16782,51 @@
           </a:bodyPr>
           <a:lstStyle/>
           <a:p>
-            <a:pPr algn="l"/>
-            <a:r>
-              <a:rPr sz="1800" b="1">
-                <a:solidFill>
-                  <a:srgbClr val="FAD02C"/>
-                </a:solidFill>
-                <a:latin typeface="Arial"/>
-              </a:rPr>
-              <a:t>An α-particle, a proton, an electron and a neutron are moving with the same velocity. Then the particle having longest de Broglie wavelength is</a:t>
+            <a:pPr algn="l">
+              <a:defRPr sz="1800" b="1">
+                <a:solidFill>
+                  <a:srgbClr val="FAD02C"/>
+                </a:solidFill>
+                <a:latin typeface="Arial"/>
+              </a:defRPr>
+            </a:pPr>
+            <a:r>
+              <a:rPr lang="en-US" sz="1800" b="1">
+                <a:solidFill>
+                  <a:srgbClr val="FAD02C"/>
+                </a:solidFill>
+                <a:latin typeface="Arial"/>
+              </a:rPr>
+              <a:t>An</a:t>
+            </a:r>
+            <a:r>
+              <a:rPr lang="en-US" sz="1800" b="1">
+                <a:solidFill>
+                  <a:srgbClr val="FAD02C"/>
+                </a:solidFill>
+                <a:latin typeface="Arial"/>
+              </a:rPr>
+              <a:t> </a:t>
+            </a:r>
+            <mc:AlternateContent xmlns:mc="http://schemas.openxmlformats.org/markup-compatibility/2006" xmlns:a14="http://schemas.microsoft.com/office/drawing/2010/main">
+              <mc:Choice Requires="a14">
+                <a14:m>
+                  <m:oMath xmlns:m="http://schemas.openxmlformats.org/officeDocument/2006/math">
+                    <m:r>
+                      <m:t>α</m:t>
+                    </m:r>
+                  </m:oMath>
+                </a14:m>
+              </mc:Choice>
+            </mc:AlternateContent>
+            <a:r>
+              <a:rPr lang="en-US" sz="1800" b="1">
+                <a:solidFill>
+                  <a:srgbClr val="FAD02C"/>
+                </a:solidFill>
+                <a:latin typeface="Arial"/>
+              </a:rPr>
+              <a:t>-particle, a proton, an electron and a neutron are moving with the same velocity. Then the particle having longest de Broglie wavelength is</a:t>
             </a:r>
           </a:p>
         </p:txBody>
@@ -14372,7 +16985,14 @@
           </a:bodyPr>
           <a:lstStyle/>
           <a:p>
-            <a:pPr algn="l"/>
+            <a:pPr algn="l">
+              <a:defRPr sz="1600">
+                <a:solidFill>
+                  <a:srgbClr val="F0F0F0"/>
+                </a:solidFill>
+                <a:latin typeface="Arial"/>
+              </a:defRPr>
+            </a:pPr>
             <a:r>
               <a:rPr b="1" sz="1600">
                 <a:solidFill>
@@ -14382,14 +17002,25 @@
               </a:rPr>
               <a:t>D. </a:t>
             </a:r>
-            <a:r>
-              <a:rPr sz="1600" b="0">
+            <mc:AlternateContent xmlns:mc="http://schemas.openxmlformats.org/markup-compatibility/2006" xmlns:a14="http://schemas.microsoft.com/office/drawing/2010/main">
+              <mc:Choice Requires="a14">
+                <a14:m>
+                  <m:oMath xmlns:m="http://schemas.openxmlformats.org/officeDocument/2006/math">
+                    <m:r>
+                      <m:t>α</m:t>
+                    </m:r>
+                  </m:oMath>
+                </a14:m>
+              </mc:Choice>
+            </mc:AlternateContent>
+            <a:r>
+              <a:rPr lang="en-US" sz="1600">
                 <a:solidFill>
                   <a:srgbClr val="F0F0F0"/>
                 </a:solidFill>
                 <a:latin typeface="Arial"/>
               </a:rPr>
-              <a:t>α-particle.</a:t>
+              <a:t>-particle.</a:t>
             </a:r>
           </a:p>
         </p:txBody>
